--- a/Especializacion/Proyecto I/Clases/Presentacion del Curso - Proyecto I.pptx
+++ b/Especializacion/Proyecto I/Clases/Presentacion del Curso - Proyecto I.pptx
@@ -6590,7 +6590,7 @@
                 </a:solidFill>
                 <a:latin typeface="Calibri"/>
               </a:rPr>
-              <a:t>10/08/2026</a:t>
+              <a:t>03/08/2026</a:t>
             </a:r>
           </a:p>
         </p:txBody>
@@ -6685,7 +6685,7 @@
                 </a:solidFill>
                 <a:latin typeface="Calibri"/>
               </a:rPr>
-              <a:t>31/08/2026</a:t>
+              <a:t>30/08/2026</a:t>
             </a:r>
           </a:p>
         </p:txBody>
@@ -6954,7 +6954,7 @@
                 </a:solidFill>
                 <a:latin typeface="Calibri"/>
               </a:rPr>
-              <a:t>28/09/2026</a:t>
+              <a:t>04/10/2026</a:t>
             </a:r>
           </a:p>
         </p:txBody>
@@ -7128,7 +7128,7 @@
                 </a:solidFill>
                 <a:latin typeface="Calibri"/>
               </a:rPr>
-              <a:t>05/10/2026</a:t>
+              <a:t>12/10/2026</a:t>
             </a:r>
           </a:p>
         </p:txBody>
@@ -7223,7 +7223,7 @@
                 </a:solidFill>
                 <a:latin typeface="Calibri"/>
               </a:rPr>
-              <a:t>09/11/2026</a:t>
+              <a:t>08/11/2026</a:t>
             </a:r>
           </a:p>
         </p:txBody>
@@ -7397,7 +7397,7 @@
                 </a:solidFill>
                 <a:latin typeface="Calibri"/>
               </a:rPr>
-              <a:t>10/11/2026</a:t>
+              <a:t>09/11/2026</a:t>
             </a:r>
           </a:p>
         </p:txBody>

--- a/Especializacion/Proyecto I/Clases/Presentacion del Curso - Proyecto I.pptx
+++ b/Especializacion/Proyecto I/Clases/Presentacion del Curso - Proyecto I.pptx
@@ -3483,6 +3483,24 @@
               </a:rPr>
               <a:t>Lunes, 8:00 pm – 10:00 pm (2 horas)</a:t>
             </a:r>
+            <a:r>
+              <a:rPr sz="1500" b="0" i="0">
+                <a:solidFill>
+                  <a:srgbClr val="2B2B2B"/>
+                </a:solidFill>
+                <a:latin typeface="Calibri"/>
+              </a:rPr>
+              <a:t> · inicio efectivo </a:t>
+            </a:r>
+            <a:r>
+              <a:rPr sz="1500" b="1" i="0">
+                <a:solidFill>
+                  <a:srgbClr val="2B2B2B"/>
+                </a:solidFill>
+                <a:latin typeface="Calibri"/>
+              </a:rPr>
+              <a:t>8:10 pm</a:t>
+            </a:r>
           </a:p>
           <a:p>
             <a:pPr>
@@ -3541,41 +3559,6 @@
                 <a:latin typeface="Calibri"/>
               </a:rPr>
               <a:t> julian_castanoe@cun.edu.co</a:t>
-            </a:r>
-          </a:p>
-        </p:txBody>
-      </p:sp>
-      <p:sp>
-        <p:nvSpPr>
-          <p:cNvPr id="7" name="TextBox 6"/>
-          <p:cNvSpPr txBox="1"/>
-          <p:nvPr/>
-        </p:nvSpPr>
-        <p:spPr>
-          <a:xfrm>
-            <a:off x="2194560" y="6446520"/>
-            <a:ext cx="5943600" cy="274320"/>
-          </a:xfrm>
-          <a:prstGeom prst="rect">
-            <a:avLst/>
-          </a:prstGeom>
-          <a:noFill/>
-        </p:spPr>
-        <p:txBody>
-          <a:bodyPr wrap="square" anchor="t" lIns="0" rIns="0" tIns="0" bIns="0">
-            <a:spAutoFit/>
-          </a:bodyPr>
-          <a:lstStyle/>
-          <a:p>
-            <a:pPr algn="l"/>
-            <a:r>
-              <a:rPr sz="1000" b="1" i="0">
-                <a:solidFill>
-                  <a:srgbClr val="8F989D"/>
-                </a:solidFill>
-                <a:latin typeface="Calibri"/>
-              </a:rPr>
-              <a:t>Inicio 8:10 pm</a:t>
             </a:r>
           </a:p>
         </p:txBody>
@@ -3952,41 +3935,6 @@
         </p:nvSpPr>
         <p:spPr>
           <a:xfrm>
-            <a:off x="2194560" y="6446520"/>
-            <a:ext cx="5943600" cy="274320"/>
-          </a:xfrm>
-          <a:prstGeom prst="rect">
-            <a:avLst/>
-          </a:prstGeom>
-          <a:noFill/>
-        </p:spPr>
-        <p:txBody>
-          <a:bodyPr wrap="square" anchor="t" lIns="0" rIns="0" tIns="0" bIns="0">
-            <a:spAutoFit/>
-          </a:bodyPr>
-          <a:lstStyle/>
-          <a:p>
-            <a:pPr algn="l"/>
-            <a:r>
-              <a:rPr sz="1000" b="1" i="0">
-                <a:solidFill>
-                  <a:srgbClr val="8F989D"/>
-                </a:solidFill>
-                <a:latin typeface="Calibri"/>
-              </a:rPr>
-              <a:t>Inicio 8:10 pm</a:t>
-            </a:r>
-          </a:p>
-        </p:txBody>
-      </p:sp>
-      <p:sp>
-        <p:nvSpPr>
-          <p:cNvPr id="12" name="TextBox 11"/>
-          <p:cNvSpPr txBox="1"/>
-          <p:nvPr/>
-        </p:nvSpPr>
-        <p:spPr>
-          <a:xfrm>
             <a:off x="11094415" y="6446520"/>
             <a:ext cx="548640" cy="274320"/>
           </a:xfrm>
@@ -4542,41 +4490,6 @@
       <p:sp>
         <p:nvSpPr>
           <p:cNvPr id="6" name="TextBox 5"/>
-          <p:cNvSpPr txBox="1"/>
-          <p:nvPr/>
-        </p:nvSpPr>
-        <p:spPr>
-          <a:xfrm>
-            <a:off x="2194560" y="6446520"/>
-            <a:ext cx="5943600" cy="274320"/>
-          </a:xfrm>
-          <a:prstGeom prst="rect">
-            <a:avLst/>
-          </a:prstGeom>
-          <a:noFill/>
-        </p:spPr>
-        <p:txBody>
-          <a:bodyPr wrap="square" anchor="t" lIns="0" rIns="0" tIns="0" bIns="0">
-            <a:spAutoFit/>
-          </a:bodyPr>
-          <a:lstStyle/>
-          <a:p>
-            <a:pPr algn="l"/>
-            <a:r>
-              <a:rPr sz="1000" b="1" i="0">
-                <a:solidFill>
-                  <a:srgbClr val="8F989D"/>
-                </a:solidFill>
-                <a:latin typeface="Calibri"/>
-              </a:rPr>
-              <a:t>Inicio 8:10 pm</a:t>
-            </a:r>
-          </a:p>
-        </p:txBody>
-      </p:sp>
-      <p:sp>
-        <p:nvSpPr>
-          <p:cNvPr id="7" name="TextBox 6"/>
           <p:cNvSpPr txBox="1"/>
           <p:nvPr/>
         </p:nvSpPr>
@@ -5209,41 +5122,6 @@
         </p:nvSpPr>
         <p:spPr>
           <a:xfrm>
-            <a:off x="2194560" y="6446520"/>
-            <a:ext cx="5943600" cy="274320"/>
-          </a:xfrm>
-          <a:prstGeom prst="rect">
-            <a:avLst/>
-          </a:prstGeom>
-          <a:noFill/>
-        </p:spPr>
-        <p:txBody>
-          <a:bodyPr wrap="square" anchor="t" lIns="0" rIns="0" tIns="0" bIns="0">
-            <a:spAutoFit/>
-          </a:bodyPr>
-          <a:lstStyle/>
-          <a:p>
-            <a:pPr algn="l"/>
-            <a:r>
-              <a:rPr sz="1000" b="1" i="0">
-                <a:solidFill>
-                  <a:srgbClr val="8F989D"/>
-                </a:solidFill>
-                <a:latin typeface="Calibri"/>
-              </a:rPr>
-              <a:t>Inicio 8:10 pm</a:t>
-            </a:r>
-          </a:p>
-        </p:txBody>
-      </p:sp>
-      <p:sp>
-        <p:nvSpPr>
-          <p:cNvPr id="7" name="TextBox 6"/>
-          <p:cNvSpPr txBox="1"/>
-          <p:nvPr/>
-        </p:nvSpPr>
-        <p:spPr>
-          <a:xfrm>
             <a:off x="11094415" y="6446520"/>
             <a:ext cx="548640" cy="274320"/>
           </a:xfrm>
@@ -5735,41 +5613,6 @@
         </p:nvSpPr>
         <p:spPr>
           <a:xfrm>
-            <a:off x="2194560" y="6446520"/>
-            <a:ext cx="5943600" cy="274320"/>
-          </a:xfrm>
-          <a:prstGeom prst="rect">
-            <a:avLst/>
-          </a:prstGeom>
-          <a:noFill/>
-        </p:spPr>
-        <p:txBody>
-          <a:bodyPr wrap="square" anchor="t" lIns="0" rIns="0" tIns="0" bIns="0">
-            <a:spAutoFit/>
-          </a:bodyPr>
-          <a:lstStyle/>
-          <a:p>
-            <a:pPr algn="l"/>
-            <a:r>
-              <a:rPr sz="1000" b="1" i="0">
-                <a:solidFill>
-                  <a:srgbClr val="8F989D"/>
-                </a:solidFill>
-                <a:latin typeface="Calibri"/>
-              </a:rPr>
-              <a:t>Inicio 8:10 pm</a:t>
-            </a:r>
-          </a:p>
-        </p:txBody>
-      </p:sp>
-      <p:sp>
-        <p:nvSpPr>
-          <p:cNvPr id="6" name="TextBox 5"/>
-          <p:cNvSpPr txBox="1"/>
-          <p:nvPr/>
-        </p:nvSpPr>
-        <p:spPr>
-          <a:xfrm>
             <a:off x="11094415" y="6446520"/>
             <a:ext cx="548640" cy="274320"/>
           </a:xfrm>
@@ -6192,41 +6035,6 @@
         </p:nvSpPr>
         <p:spPr>
           <a:xfrm>
-            <a:off x="2194560" y="6446520"/>
-            <a:ext cx="5943600" cy="274320"/>
-          </a:xfrm>
-          <a:prstGeom prst="rect">
-            <a:avLst/>
-          </a:prstGeom>
-          <a:noFill/>
-        </p:spPr>
-        <p:txBody>
-          <a:bodyPr wrap="square" anchor="t" lIns="0" rIns="0" tIns="0" bIns="0">
-            <a:spAutoFit/>
-          </a:bodyPr>
-          <a:lstStyle/>
-          <a:p>
-            <a:pPr algn="l"/>
-            <a:r>
-              <a:rPr sz="1000" b="1" i="0">
-                <a:solidFill>
-                  <a:srgbClr val="8F989D"/>
-                </a:solidFill>
-                <a:latin typeface="Calibri"/>
-              </a:rPr>
-              <a:t>Inicio 8:10 pm</a:t>
-            </a:r>
-          </a:p>
-        </p:txBody>
-      </p:sp>
-      <p:sp>
-        <p:nvSpPr>
-          <p:cNvPr id="11" name="TextBox 10"/>
-          <p:cNvSpPr txBox="1"/>
-          <p:nvPr/>
-        </p:nvSpPr>
-        <p:spPr>
-          <a:xfrm>
             <a:off x="11094415" y="6446520"/>
             <a:ext cx="548640" cy="274320"/>
           </a:xfrm>
@@ -7635,41 +7443,6 @@
         </p:nvSpPr>
         <p:spPr>
           <a:xfrm>
-            <a:off x="2194560" y="6446520"/>
-            <a:ext cx="5943600" cy="274320"/>
-          </a:xfrm>
-          <a:prstGeom prst="rect">
-            <a:avLst/>
-          </a:prstGeom>
-          <a:noFill/>
-        </p:spPr>
-        <p:txBody>
-          <a:bodyPr wrap="square" anchor="t" lIns="0" rIns="0" tIns="0" bIns="0">
-            <a:spAutoFit/>
-          </a:bodyPr>
-          <a:lstStyle/>
-          <a:p>
-            <a:pPr algn="l"/>
-            <a:r>
-              <a:rPr sz="1000" b="1" i="0">
-                <a:solidFill>
-                  <a:srgbClr val="8F989D"/>
-                </a:solidFill>
-                <a:latin typeface="Calibri"/>
-              </a:rPr>
-              <a:t>Inicio 8:10 pm</a:t>
-            </a:r>
-          </a:p>
-        </p:txBody>
-      </p:sp>
-      <p:sp>
-        <p:nvSpPr>
-          <p:cNvPr id="33" name="TextBox 32"/>
-          <p:cNvSpPr txBox="1"/>
-          <p:nvPr/>
-        </p:nvSpPr>
-        <p:spPr>
-          <a:xfrm>
             <a:off x="11094415" y="6446520"/>
             <a:ext cx="548640" cy="274320"/>
           </a:xfrm>
@@ -8105,41 +7878,6 @@
       <p:sp>
         <p:nvSpPr>
           <p:cNvPr id="10" name="TextBox 9"/>
-          <p:cNvSpPr txBox="1"/>
-          <p:nvPr/>
-        </p:nvSpPr>
-        <p:spPr>
-          <a:xfrm>
-            <a:off x="2194560" y="6446520"/>
-            <a:ext cx="5943600" cy="274320"/>
-          </a:xfrm>
-          <a:prstGeom prst="rect">
-            <a:avLst/>
-          </a:prstGeom>
-          <a:noFill/>
-        </p:spPr>
-        <p:txBody>
-          <a:bodyPr wrap="square" anchor="t" lIns="0" rIns="0" tIns="0" bIns="0">
-            <a:spAutoFit/>
-          </a:bodyPr>
-          <a:lstStyle/>
-          <a:p>
-            <a:pPr algn="l"/>
-            <a:r>
-              <a:rPr sz="1000" b="1" i="0">
-                <a:solidFill>
-                  <a:srgbClr val="8F989D"/>
-                </a:solidFill>
-                <a:latin typeface="Calibri"/>
-              </a:rPr>
-              <a:t>Inicio 8:10 pm</a:t>
-            </a:r>
-          </a:p>
-        </p:txBody>
-      </p:sp>
-      <p:sp>
-        <p:nvSpPr>
-          <p:cNvPr id="11" name="TextBox 10"/>
           <p:cNvSpPr txBox="1"/>
           <p:nvPr/>
         </p:nvSpPr>
@@ -8537,41 +8275,6 @@
         </p:nvSpPr>
         <p:spPr>
           <a:xfrm>
-            <a:off x="2194560" y="6446520"/>
-            <a:ext cx="5943600" cy="274320"/>
-          </a:xfrm>
-          <a:prstGeom prst="rect">
-            <a:avLst/>
-          </a:prstGeom>
-          <a:noFill/>
-        </p:spPr>
-        <p:txBody>
-          <a:bodyPr wrap="square" anchor="t" lIns="0" rIns="0" tIns="0" bIns="0">
-            <a:spAutoFit/>
-          </a:bodyPr>
-          <a:lstStyle/>
-          <a:p>
-            <a:pPr algn="l"/>
-            <a:r>
-              <a:rPr sz="1000" b="1" i="0">
-                <a:solidFill>
-                  <a:srgbClr val="8F989D"/>
-                </a:solidFill>
-                <a:latin typeface="Calibri"/>
-              </a:rPr>
-              <a:t>Inicio 8:10 pm</a:t>
-            </a:r>
-          </a:p>
-        </p:txBody>
-      </p:sp>
-      <p:sp>
-        <p:nvSpPr>
-          <p:cNvPr id="7" name="TextBox 6"/>
-          <p:cNvSpPr txBox="1"/>
-          <p:nvPr/>
-        </p:nvSpPr>
-        <p:spPr>
-          <a:xfrm>
             <a:off x="11094415" y="6446520"/>
             <a:ext cx="548640" cy="274320"/>
           </a:xfrm>
@@ -8935,7 +8638,7 @@
                 </a:solidFill>
                 <a:latin typeface="Calibri"/>
               </a:rPr>
-              <a:t> (archivo local): `Cursos/Plantilla_APA_CUN_Proyecto de grado.docx`.</a:t>
+              <a:t> (viene en tu carpeta del curso): `Recursos/Plantilla_APA_CUN_Proyecto de grado.docx`.</a:t>
             </a:r>
           </a:p>
           <a:p>
@@ -8960,7 +8663,7 @@
                 </a:solidFill>
                 <a:latin typeface="Calibri"/>
               </a:rPr>
-              <a:t>URL pública Plantilla APA:</a:t>
+              <a:t>Plantilla APA CUN (en tu carpeta):</a:t>
             </a:r>
             <a:r>
               <a:rPr sz="1600" b="0" i="0">
@@ -8969,7 +8672,7 @@
                 </a:solidFill>
                 <a:latin typeface="Calibri"/>
               </a:rPr>
-              <a:t> [URL Drive/Moodle de la Plantilla APA CUN — pendiente]</a:t>
+              <a:t> `Recursos/Plantilla_APA_CUN_Proyecto de grado.docx`</a:t>
             </a:r>
           </a:p>
           <a:p>
@@ -9079,41 +8782,6 @@
       <p:sp>
         <p:nvSpPr>
           <p:cNvPr id="5" name="TextBox 4"/>
-          <p:cNvSpPr txBox="1"/>
-          <p:nvPr/>
-        </p:nvSpPr>
-        <p:spPr>
-          <a:xfrm>
-            <a:off x="2194560" y="6446520"/>
-            <a:ext cx="5943600" cy="274320"/>
-          </a:xfrm>
-          <a:prstGeom prst="rect">
-            <a:avLst/>
-          </a:prstGeom>
-          <a:noFill/>
-        </p:spPr>
-        <p:txBody>
-          <a:bodyPr wrap="square" anchor="t" lIns="0" rIns="0" tIns="0" bIns="0">
-            <a:spAutoFit/>
-          </a:bodyPr>
-          <a:lstStyle/>
-          <a:p>
-            <a:pPr algn="l"/>
-            <a:r>
-              <a:rPr sz="1000" b="1" i="0">
-                <a:solidFill>
-                  <a:srgbClr val="8F989D"/>
-                </a:solidFill>
-                <a:latin typeface="Calibri"/>
-              </a:rPr>
-              <a:t>Inicio 8:10 pm</a:t>
-            </a:r>
-          </a:p>
-        </p:txBody>
-      </p:sp>
-      <p:sp>
-        <p:nvSpPr>
-          <p:cNvPr id="6" name="TextBox 5"/>
           <p:cNvSpPr txBox="1"/>
           <p:nvPr/>
         </p:nvSpPr>
@@ -9415,41 +9083,6 @@
           </a:p>
         </p:txBody>
       </p:sp>
-      <p:sp>
-        <p:nvSpPr>
-          <p:cNvPr id="7" name="TextBox 6"/>
-          <p:cNvSpPr txBox="1"/>
-          <p:nvPr/>
-        </p:nvSpPr>
-        <p:spPr>
-          <a:xfrm>
-            <a:off x="2194560" y="6446520"/>
-            <a:ext cx="5943600" cy="274320"/>
-          </a:xfrm>
-          <a:prstGeom prst="rect">
-            <a:avLst/>
-          </a:prstGeom>
-          <a:noFill/>
-        </p:spPr>
-        <p:txBody>
-          <a:bodyPr wrap="square" anchor="t" lIns="0" rIns="0" tIns="0" bIns="0">
-            <a:spAutoFit/>
-          </a:bodyPr>
-          <a:lstStyle/>
-          <a:p>
-            <a:pPr algn="l"/>
-            <a:r>
-              <a:rPr sz="1000" b="1" i="0">
-                <a:solidFill>
-                  <a:srgbClr val="8F989D"/>
-                </a:solidFill>
-                <a:latin typeface="Calibri"/>
-              </a:rPr>
-              <a:t>Inicio 8:10 pm</a:t>
-            </a:r>
-          </a:p>
-        </p:txBody>
-      </p:sp>
     </p:spTree>
   </p:cSld>
   <p:clrMapOvr>
@@ -9732,41 +9365,6 @@
         </p:nvSpPr>
         <p:spPr>
           <a:xfrm>
-            <a:off x="2194560" y="6446520"/>
-            <a:ext cx="5943600" cy="274320"/>
-          </a:xfrm>
-          <a:prstGeom prst="rect">
-            <a:avLst/>
-          </a:prstGeom>
-          <a:noFill/>
-        </p:spPr>
-        <p:txBody>
-          <a:bodyPr wrap="square" anchor="t" lIns="0" rIns="0" tIns="0" bIns="0">
-            <a:spAutoFit/>
-          </a:bodyPr>
-          <a:lstStyle/>
-          <a:p>
-            <a:pPr algn="l"/>
-            <a:r>
-              <a:rPr sz="1000" b="1" i="0">
-                <a:solidFill>
-                  <a:srgbClr val="8F989D"/>
-                </a:solidFill>
-                <a:latin typeface="Calibri"/>
-              </a:rPr>
-              <a:t>Inicio 8:10 pm</a:t>
-            </a:r>
-          </a:p>
-        </p:txBody>
-      </p:sp>
-      <p:sp>
-        <p:nvSpPr>
-          <p:cNvPr id="9" name="TextBox 8"/>
-          <p:cNvSpPr txBox="1"/>
-          <p:nvPr/>
-        </p:nvSpPr>
-        <p:spPr>
-          <a:xfrm>
             <a:off x="11094415" y="6446520"/>
             <a:ext cx="548640" cy="274320"/>
           </a:xfrm>
@@ -10257,41 +9855,6 @@
         </p:nvSpPr>
         <p:spPr>
           <a:xfrm>
-            <a:off x="2194560" y="6446520"/>
-            <a:ext cx="5943600" cy="274320"/>
-          </a:xfrm>
-          <a:prstGeom prst="rect">
-            <a:avLst/>
-          </a:prstGeom>
-          <a:noFill/>
-        </p:spPr>
-        <p:txBody>
-          <a:bodyPr wrap="square" anchor="t" lIns="0" rIns="0" tIns="0" bIns="0">
-            <a:spAutoFit/>
-          </a:bodyPr>
-          <a:lstStyle/>
-          <a:p>
-            <a:pPr algn="l"/>
-            <a:r>
-              <a:rPr sz="1000" b="1" i="0">
-                <a:solidFill>
-                  <a:srgbClr val="8F989D"/>
-                </a:solidFill>
-                <a:latin typeface="Calibri"/>
-              </a:rPr>
-              <a:t>Inicio 8:10 pm</a:t>
-            </a:r>
-          </a:p>
-        </p:txBody>
-      </p:sp>
-      <p:sp>
-        <p:nvSpPr>
-          <p:cNvPr id="11" name="TextBox 10"/>
-          <p:cNvSpPr txBox="1"/>
-          <p:nvPr/>
-        </p:nvSpPr>
-        <p:spPr>
-          <a:xfrm>
             <a:off x="11094415" y="6446520"/>
             <a:ext cx="548640" cy="274320"/>
           </a:xfrm>
@@ -10625,41 +10188,6 @@
         </p:nvSpPr>
         <p:spPr>
           <a:xfrm>
-            <a:off x="2194560" y="6446520"/>
-            <a:ext cx="5943600" cy="274320"/>
-          </a:xfrm>
-          <a:prstGeom prst="rect">
-            <a:avLst/>
-          </a:prstGeom>
-          <a:noFill/>
-        </p:spPr>
-        <p:txBody>
-          <a:bodyPr wrap="square" anchor="t" lIns="0" rIns="0" tIns="0" bIns="0">
-            <a:spAutoFit/>
-          </a:bodyPr>
-          <a:lstStyle/>
-          <a:p>
-            <a:pPr algn="l"/>
-            <a:r>
-              <a:rPr sz="1000" b="1" i="0">
-                <a:solidFill>
-                  <a:srgbClr val="8F989D"/>
-                </a:solidFill>
-                <a:latin typeface="Calibri"/>
-              </a:rPr>
-              <a:t>Inicio 8:10 pm</a:t>
-            </a:r>
-          </a:p>
-        </p:txBody>
-      </p:sp>
-      <p:sp>
-        <p:nvSpPr>
-          <p:cNvPr id="6" name="TextBox 5"/>
-          <p:cNvSpPr txBox="1"/>
-          <p:nvPr/>
-        </p:nvSpPr>
-        <p:spPr>
-          <a:xfrm>
             <a:off x="11094415" y="6446520"/>
             <a:ext cx="548640" cy="274320"/>
           </a:xfrm>
@@ -10903,41 +10431,6 @@
         </p:nvSpPr>
         <p:spPr>
           <a:xfrm>
-            <a:off x="2194560" y="6446520"/>
-            <a:ext cx="5943600" cy="274320"/>
-          </a:xfrm>
-          <a:prstGeom prst="rect">
-            <a:avLst/>
-          </a:prstGeom>
-          <a:noFill/>
-        </p:spPr>
-        <p:txBody>
-          <a:bodyPr wrap="square" anchor="t" lIns="0" rIns="0" tIns="0" bIns="0">
-            <a:spAutoFit/>
-          </a:bodyPr>
-          <a:lstStyle/>
-          <a:p>
-            <a:pPr algn="l"/>
-            <a:r>
-              <a:rPr sz="1000" b="1" i="0">
-                <a:solidFill>
-                  <a:srgbClr val="8F989D"/>
-                </a:solidFill>
-                <a:latin typeface="Calibri"/>
-              </a:rPr>
-              <a:t>Inicio 8:10 pm</a:t>
-            </a:r>
-          </a:p>
-        </p:txBody>
-      </p:sp>
-      <p:sp>
-        <p:nvSpPr>
-          <p:cNvPr id="6" name="TextBox 5"/>
-          <p:cNvSpPr txBox="1"/>
-          <p:nvPr/>
-        </p:nvSpPr>
-        <p:spPr>
-          <a:xfrm>
             <a:off x="11094415" y="6446520"/>
             <a:ext cx="548640" cy="274320"/>
           </a:xfrm>
@@ -11248,41 +10741,6 @@
       <p:sp>
         <p:nvSpPr>
           <p:cNvPr id="5" name="TextBox 4"/>
-          <p:cNvSpPr txBox="1"/>
-          <p:nvPr/>
-        </p:nvSpPr>
-        <p:spPr>
-          <a:xfrm>
-            <a:off x="2194560" y="6446520"/>
-            <a:ext cx="5943600" cy="274320"/>
-          </a:xfrm>
-          <a:prstGeom prst="rect">
-            <a:avLst/>
-          </a:prstGeom>
-          <a:noFill/>
-        </p:spPr>
-        <p:txBody>
-          <a:bodyPr wrap="square" anchor="t" lIns="0" rIns="0" tIns="0" bIns="0">
-            <a:spAutoFit/>
-          </a:bodyPr>
-          <a:lstStyle/>
-          <a:p>
-            <a:pPr algn="l"/>
-            <a:r>
-              <a:rPr sz="1000" b="1" i="0">
-                <a:solidFill>
-                  <a:srgbClr val="8F989D"/>
-                </a:solidFill>
-                <a:latin typeface="Calibri"/>
-              </a:rPr>
-              <a:t>Inicio 8:10 pm</a:t>
-            </a:r>
-          </a:p>
-        </p:txBody>
-      </p:sp>
-      <p:sp>
-        <p:nvSpPr>
-          <p:cNvPr id="6" name="TextBox 5"/>
           <p:cNvSpPr txBox="1"/>
           <p:nvPr/>
         </p:nvSpPr>
@@ -12057,41 +11515,6 @@
         </p:nvSpPr>
         <p:spPr>
           <a:xfrm>
-            <a:off x="2194560" y="6446520"/>
-            <a:ext cx="5943600" cy="274320"/>
-          </a:xfrm>
-          <a:prstGeom prst="rect">
-            <a:avLst/>
-          </a:prstGeom>
-          <a:noFill/>
-        </p:spPr>
-        <p:txBody>
-          <a:bodyPr wrap="square" anchor="t" lIns="0" rIns="0" tIns="0" bIns="0">
-            <a:spAutoFit/>
-          </a:bodyPr>
-          <a:lstStyle/>
-          <a:p>
-            <a:pPr algn="l"/>
-            <a:r>
-              <a:rPr sz="1000" b="1" i="0">
-                <a:solidFill>
-                  <a:srgbClr val="8F989D"/>
-                </a:solidFill>
-                <a:latin typeface="Calibri"/>
-              </a:rPr>
-              <a:t>Inicio 8:10 pm</a:t>
-            </a:r>
-          </a:p>
-        </p:txBody>
-      </p:sp>
-      <p:sp>
-        <p:nvSpPr>
-          <p:cNvPr id="7" name="TextBox 6"/>
-          <p:cNvSpPr txBox="1"/>
-          <p:nvPr/>
-        </p:nvSpPr>
-        <p:spPr>
-          <a:xfrm>
             <a:off x="11094415" y="6446520"/>
             <a:ext cx="548640" cy="274320"/>
           </a:xfrm>
@@ -12416,41 +11839,6 @@
       <p:sp>
         <p:nvSpPr>
           <p:cNvPr id="5" name="TextBox 4"/>
-          <p:cNvSpPr txBox="1"/>
-          <p:nvPr/>
-        </p:nvSpPr>
-        <p:spPr>
-          <a:xfrm>
-            <a:off x="2194560" y="6446520"/>
-            <a:ext cx="5943600" cy="274320"/>
-          </a:xfrm>
-          <a:prstGeom prst="rect">
-            <a:avLst/>
-          </a:prstGeom>
-          <a:noFill/>
-        </p:spPr>
-        <p:txBody>
-          <a:bodyPr wrap="square" anchor="t" lIns="0" rIns="0" tIns="0" bIns="0">
-            <a:spAutoFit/>
-          </a:bodyPr>
-          <a:lstStyle/>
-          <a:p>
-            <a:pPr algn="l"/>
-            <a:r>
-              <a:rPr sz="1000" b="1" i="0">
-                <a:solidFill>
-                  <a:srgbClr val="8F989D"/>
-                </a:solidFill>
-                <a:latin typeface="Calibri"/>
-              </a:rPr>
-              <a:t>Inicio 8:10 pm</a:t>
-            </a:r>
-          </a:p>
-        </p:txBody>
-      </p:sp>
-      <p:sp>
-        <p:nvSpPr>
-          <p:cNvPr id="6" name="TextBox 5"/>
           <p:cNvSpPr txBox="1"/>
           <p:nvPr/>
         </p:nvSpPr>
@@ -12865,41 +12253,6 @@
       <p:sp>
         <p:nvSpPr>
           <p:cNvPr id="6" name="TextBox 5"/>
-          <p:cNvSpPr txBox="1"/>
-          <p:nvPr/>
-        </p:nvSpPr>
-        <p:spPr>
-          <a:xfrm>
-            <a:off x="2194560" y="6446520"/>
-            <a:ext cx="5943600" cy="274320"/>
-          </a:xfrm>
-          <a:prstGeom prst="rect">
-            <a:avLst/>
-          </a:prstGeom>
-          <a:noFill/>
-        </p:spPr>
-        <p:txBody>
-          <a:bodyPr wrap="square" anchor="t" lIns="0" rIns="0" tIns="0" bIns="0">
-            <a:spAutoFit/>
-          </a:bodyPr>
-          <a:lstStyle/>
-          <a:p>
-            <a:pPr algn="l"/>
-            <a:r>
-              <a:rPr sz="1000" b="1" i="0">
-                <a:solidFill>
-                  <a:srgbClr val="8F989D"/>
-                </a:solidFill>
-                <a:latin typeface="Calibri"/>
-              </a:rPr>
-              <a:t>Inicio 8:10 pm</a:t>
-            </a:r>
-          </a:p>
-        </p:txBody>
-      </p:sp>
-      <p:sp>
-        <p:nvSpPr>
-          <p:cNvPr id="7" name="TextBox 6"/>
           <p:cNvSpPr txBox="1"/>
           <p:nvPr/>
         </p:nvSpPr>

--- a/Especializacion/Proyecto I/Clases/Presentacion del Curso - Proyecto I.pptx
+++ b/Especializacion/Proyecto I/Clases/Presentacion del Curso - Proyecto I.pptx
@@ -5444,7 +5444,7 @@
                 </a:solidFill>
                 <a:latin typeface="Calibri"/>
               </a:rPr>
-              <a:t> (Moodle). Enunciados: `Clases/Recursos/ACAs/`.</a:t>
+              <a:t>. Instructivos en tu carpeta: `Recursos/ACAs/`.</a:t>
             </a:r>
           </a:p>
           <a:p>
@@ -5487,7 +5487,7 @@
                 </a:solidFill>
                 <a:latin typeface="Calibri"/>
               </a:rPr>
-              <a:t>10–16/11/2026</a:t>
+              <a:t>09/11/2026–15/11/2026</a:t>
             </a:r>
             <a:r>
               <a:rPr sz="1300" b="0" i="0">
@@ -5505,7 +5505,7 @@
                 </a:solidFill>
                 <a:latin typeface="Calibri"/>
               </a:rPr>
-              <a:t>17–22/11/2026</a:t>
+              <a:t>16/11/2026–22/11/2026</a:t>
             </a:r>
             <a:r>
               <a:rPr sz="1300" b="0" i="0">

--- a/Especializacion/Proyecto I/Clases/Presentacion del Curso - Proyecto I.pptx
+++ b/Especializacion/Proyecto I/Clases/Presentacion del Curso - Proyecto I.pptx
@@ -8604,7 +8604,7 @@
                 </a:solidFill>
                 <a:latin typeface="Calibri"/>
               </a:rPr>
-              <a:t>[URL Meet — mismo enlace toda la serie · Proyecto I]</a:t>
+              <a:t>https://meet.google.com/omk-woqk-vsj</a:t>
             </a:r>
           </a:p>
           <a:p>

--- a/Especializacion/Proyecto I/Clases/Presentacion del Curso - Proyecto I.pptx
+++ b/Especializacion/Proyecto I/Clases/Presentacion del Curso - Proyecto I.pptx
@@ -8502,7 +8502,7 @@
                 </a:solidFill>
                 <a:latin typeface="Calibri"/>
               </a:rPr>
-              <a:t>[URL CDigital — campus del curso pendiente]</a:t>
+              <a:t>https://cdigital.cun.edu.co/course/view.php?id=130378</a:t>
             </a:r>
           </a:p>
           <a:p>

--- a/Especializacion/Proyecto I/Clases/Presentacion del Curso - Proyecto I.pptx
+++ b/Especializacion/Proyecto I/Clases/Presentacion del Curso - Proyecto I.pptx
@@ -3397,7 +3397,7 @@
                 </a:solidFill>
                 <a:latin typeface="Calibri"/>
               </a:rPr>
-              <a:t> ESP329 · Virtual · 2 créditos · Nota única</a:t>
+              <a:t> ESP329 · Virtual · 2 créditos · 25% / 25% / 50% en tres cortes</a:t>
             </a:r>
           </a:p>
           <a:p>
@@ -4622,7 +4622,7 @@
                 </a:solidFill>
                 <a:latin typeface="Calibri"/>
               </a:rPr>
-              <a:t>EVALUACIÓN — NOTA ÚNICA (ESP329 / Art. 41)</a:t>
+              <a:t>EVALUACIÓN — LOS TRES CORTES EN EL AULA (ESP329 / Art. 41)</a:t>
             </a:r>
           </a:p>
         </p:txBody>
@@ -4637,7 +4637,7 @@
         </p:nvGraphicFramePr>
         <p:xfrm>
           <a:off x="640080" y="1691639"/>
-          <a:ext cx="10911534" cy="3017520"/>
+          <a:ext cx="10911533" cy="3017520"/>
         </p:xfrm>
         <a:graphic>
           <a:graphicData uri="http://schemas.openxmlformats.org/drawingml/2006/table">
@@ -4646,9 +4646,11 @@
                 <a:tableStyleId>{2D5ABB26-0587-4C30-8999-92F81FD0307C}</a:tableStyleId>
               </a:tblPr>
               <a:tblGrid>
-                <a:gridCol w="3203386"/>
-                <a:gridCol w="1001058"/>
-                <a:gridCol w="6707090"/>
+                <a:gridCol w="1925565"/>
+                <a:gridCol w="1283710"/>
+                <a:gridCol w="1375403"/>
+                <a:gridCol w="916935"/>
+                <a:gridCol w="5409920"/>
               </a:tblGrid>
               <a:tr h="502920">
                 <a:tc>
@@ -4664,7 +4666,7 @@
                           </a:solidFill>
                           <a:latin typeface="Calibri"/>
                         </a:rPr>
-                        <a:t>Componente</a:t>
+                        <a:t>Ítem en CDigital</a:t>
                       </a:r>
                     </a:p>
                   </a:txBody>
@@ -4687,7 +4689,53 @@
                           </a:solidFill>
                           <a:latin typeface="Calibri"/>
                         </a:rPr>
-                        <a:t>%</a:t>
+                        <a:t>Tipo</a:t>
+                      </a:r>
+                    </a:p>
+                  </a:txBody>
+                  <a:tcPr anchor="ctr" marL="109728" marR="91440" marT="36576" marB="36576">
+                    <a:solidFill>
+                      <a:srgbClr val="0C2340"/>
+                    </a:solidFill>
+                  </a:tcPr>
+                </a:tc>
+                <a:tc>
+                  <a:txBody>
+                    <a:bodyPr/>
+                    <a:lstStyle/>
+                    <a:p>
+                      <a:pPr algn="l"/>
+                      <a:r>
+                        <a:rPr sz="1300" b="1" i="0">
+                          <a:solidFill>
+                            <a:srgbClr val="FFFFFF"/>
+                          </a:solidFill>
+                          <a:latin typeface="Calibri"/>
+                        </a:rPr>
+                        <a:t>Corte (peso)</a:t>
+                      </a:r>
+                    </a:p>
+                  </a:txBody>
+                  <a:tcPr anchor="ctr" marL="109728" marR="91440" marT="36576" marB="36576">
+                    <a:solidFill>
+                      <a:srgbClr val="0C2340"/>
+                    </a:solidFill>
+                  </a:tcPr>
+                </a:tc>
+                <a:tc>
+                  <a:txBody>
+                    <a:bodyPr/>
+                    <a:lstStyle/>
+                    <a:p>
+                      <a:pPr algn="l"/>
+                      <a:r>
+                        <a:rPr sz="1300" b="1" i="0">
+                          <a:solidFill>
+                            <a:srgbClr val="FFFFFF"/>
+                          </a:solidFill>
+                          <a:latin typeface="Calibri"/>
+                        </a:rPr>
+                        <a:t>Peso</a:t>
                       </a:r>
                     </a:p>
                   </a:txBody>
@@ -4729,13 +4777,13 @@
                     <a:p>
                       <a:pPr algn="l"/>
                       <a:r>
-                        <a:rPr sz="1200" b="0" i="0">
+                        <a:rPr sz="1100" b="1" i="0">
                           <a:solidFill>
                             <a:srgbClr val="2B2B2B"/>
                           </a:solidFill>
                           <a:latin typeface="Calibri"/>
                         </a:rPr>
-                        <a:t>ACA 1</a:t>
+                        <a:t>Quiz</a:t>
                       </a:r>
                     </a:p>
                   </a:txBody>
@@ -4752,7 +4800,53 @@
                     <a:p>
                       <a:pPr algn="l"/>
                       <a:r>
-                        <a:rPr sz="1200" b="0" i="0">
+                        <a:rPr sz="1100" b="0" i="0">
+                          <a:solidFill>
+                            <a:srgbClr val="2B2B2B"/>
+                          </a:solidFill>
+                          <a:latin typeface="Calibri"/>
+                        </a:rPr>
+                        <a:t>Cuestionario</a:t>
+                      </a:r>
+                    </a:p>
+                  </a:txBody>
+                  <a:tcPr anchor="ctr" marL="109728" marR="91440" marT="36576" marB="36576">
+                    <a:solidFill>
+                      <a:srgbClr val="FFFFFF"/>
+                    </a:solidFill>
+                  </a:tcPr>
+                </a:tc>
+                <a:tc>
+                  <a:txBody>
+                    <a:bodyPr/>
+                    <a:lstStyle/>
+                    <a:p>
+                      <a:pPr algn="l"/>
+                      <a:r>
+                        <a:rPr sz="1100" b="0" i="0">
+                          <a:solidFill>
+                            <a:srgbClr val="2B2B2B"/>
+                          </a:solidFill>
+                          <a:latin typeface="Calibri"/>
+                        </a:rPr>
+                        <a:t>1 (25%)</a:t>
+                      </a:r>
+                    </a:p>
+                  </a:txBody>
+                  <a:tcPr anchor="ctr" marL="109728" marR="91440" marT="36576" marB="36576">
+                    <a:solidFill>
+                      <a:srgbClr val="FFFFFF"/>
+                    </a:solidFill>
+                  </a:tcPr>
+                </a:tc>
+                <a:tc>
+                  <a:txBody>
+                    <a:bodyPr/>
+                    <a:lstStyle/>
+                    <a:p>
+                      <a:pPr algn="l"/>
+                      <a:r>
+                        <a:rPr sz="1100" b="1" i="0">
                           <a:solidFill>
                             <a:srgbClr val="2B2B2B"/>
                           </a:solidFill>
@@ -4775,13 +4869,13 @@
                     <a:p>
                       <a:pPr algn="l"/>
                       <a:r>
-                        <a:rPr sz="1200" b="0" i="0">
+                        <a:rPr sz="1100" b="0" i="0">
                           <a:solidFill>
                             <a:srgbClr val="2B2B2B"/>
                           </a:solidFill>
                           <a:latin typeface="Calibri"/>
                         </a:rPr>
-                        <a:t>Avance: problema, pregunta, objetivos, justificación…</a:t>
+                        <a:t>Comprobación individual en CDigital de las sesiones 02–03: problema, pregunta, objetivos y justificación (guía: documento «ACA 1»).</a:t>
                       </a:r>
                     </a:p>
                   </a:txBody>
@@ -4800,13 +4894,13 @@
                     <a:p>
                       <a:pPr algn="l"/>
                       <a:r>
-                        <a:rPr sz="1200" b="0" i="0">
+                        <a:rPr sz="1100" b="1" i="0">
                           <a:solidFill>
                             <a:srgbClr val="2B2B2B"/>
                           </a:solidFill>
                           <a:latin typeface="Calibri"/>
                         </a:rPr>
-                        <a:t>ACA 2</a:t>
+                        <a:t>ACA 1</a:t>
                       </a:r>
                     </a:p>
                   </a:txBody>
@@ -4823,7 +4917,53 @@
                     <a:p>
                       <a:pPr algn="l"/>
                       <a:r>
-                        <a:rPr sz="1200" b="0" i="0">
+                        <a:rPr sz="1100" b="0" i="0">
+                          <a:solidFill>
+                            <a:srgbClr val="2B2B2B"/>
+                          </a:solidFill>
+                          <a:latin typeface="Calibri"/>
+                        </a:rPr>
+                        <a:t>Tarea</a:t>
+                      </a:r>
+                    </a:p>
+                  </a:txBody>
+                  <a:tcPr anchor="ctr" marL="109728" marR="91440" marT="36576" marB="36576">
+                    <a:solidFill>
+                      <a:srgbClr val="F2F2F2"/>
+                    </a:solidFill>
+                  </a:tcPr>
+                </a:tc>
+                <a:tc>
+                  <a:txBody>
+                    <a:bodyPr/>
+                    <a:lstStyle/>
+                    <a:p>
+                      <a:pPr algn="l"/>
+                      <a:r>
+                        <a:rPr sz="1100" b="0" i="0">
+                          <a:solidFill>
+                            <a:srgbClr val="2B2B2B"/>
+                          </a:solidFill>
+                          <a:latin typeface="Calibri"/>
+                        </a:rPr>
+                        <a:t>2 (25%)</a:t>
+                      </a:r>
+                    </a:p>
+                  </a:txBody>
+                  <a:tcPr anchor="ctr" marL="109728" marR="91440" marT="36576" marB="36576">
+                    <a:solidFill>
+                      <a:srgbClr val="F2F2F2"/>
+                    </a:solidFill>
+                  </a:tcPr>
+                </a:tc>
+                <a:tc>
+                  <a:txBody>
+                    <a:bodyPr/>
+                    <a:lstStyle/>
+                    <a:p>
+                      <a:pPr algn="l"/>
+                      <a:r>
+                        <a:rPr sz="1100" b="1" i="0">
                           <a:solidFill>
                             <a:srgbClr val="2B2B2B"/>
                           </a:solidFill>
@@ -4846,13 +4986,13 @@
                     <a:p>
                       <a:pPr algn="l"/>
                       <a:r>
-                        <a:rPr sz="1200" b="0" i="0">
+                        <a:rPr sz="1100" b="0" i="0">
                           <a:solidFill>
                             <a:srgbClr val="2B2B2B"/>
                           </a:solidFill>
                           <a:latin typeface="Calibri"/>
                         </a:rPr>
-                        <a:t>Avance: marco referencial (antecedentes, teórico, etc.)</a:t>
+                        <a:t>Documento del equipo: correcciones + marco referencial — antecedentes, teórico, conceptual, contextual y legal (guía: documento «ACA 2»).</a:t>
                       </a:r>
                     </a:p>
                   </a:txBody>
@@ -4871,13 +5011,13 @@
                     <a:p>
                       <a:pPr algn="l"/>
                       <a:r>
-                        <a:rPr sz="1200" b="0" i="0">
+                        <a:rPr sz="1100" b="1" i="0">
                           <a:solidFill>
                             <a:srgbClr val="2B2B2B"/>
                           </a:solidFill>
                           <a:latin typeface="Calibri"/>
                         </a:rPr>
-                        <a:t>ACA 3 (anteproyecto)</a:t>
+                        <a:t>ACA FINAL</a:t>
                       </a:r>
                     </a:p>
                   </a:txBody>
@@ -4894,7 +5034,53 @@
                     <a:p>
                       <a:pPr algn="l"/>
                       <a:r>
-                        <a:rPr sz="1200" b="0" i="0">
+                        <a:rPr sz="1100" b="0" i="0">
+                          <a:solidFill>
+                            <a:srgbClr val="2B2B2B"/>
+                          </a:solidFill>
+                          <a:latin typeface="Calibri"/>
+                        </a:rPr>
+                        <a:t>Tarea</a:t>
+                      </a:r>
+                    </a:p>
+                  </a:txBody>
+                  <a:tcPr anchor="ctr" marL="109728" marR="91440" marT="36576" marB="36576">
+                    <a:solidFill>
+                      <a:srgbClr val="FFFFFF"/>
+                    </a:solidFill>
+                  </a:tcPr>
+                </a:tc>
+                <a:tc>
+                  <a:txBody>
+                    <a:bodyPr/>
+                    <a:lstStyle/>
+                    <a:p>
+                      <a:pPr algn="l"/>
+                      <a:r>
+                        <a:rPr sz="1100" b="0" i="0">
+                          <a:solidFill>
+                            <a:srgbClr val="2B2B2B"/>
+                          </a:solidFill>
+                          <a:latin typeface="Calibri"/>
+                        </a:rPr>
+                        <a:t>3 (50%)</a:t>
+                      </a:r>
+                    </a:p>
+                  </a:txBody>
+                  <a:tcPr anchor="ctr" marL="109728" marR="91440" marT="36576" marB="36576">
+                    <a:solidFill>
+                      <a:srgbClr val="FFFFFF"/>
+                    </a:solidFill>
+                  </a:tcPr>
+                </a:tc>
+                <a:tc>
+                  <a:txBody>
+                    <a:bodyPr/>
+                    <a:lstStyle/>
+                    <a:p>
+                      <a:pPr algn="l"/>
+                      <a:r>
+                        <a:rPr sz="1100" b="1" i="0">
                           <a:solidFill>
                             <a:srgbClr val="2B2B2B"/>
                           </a:solidFill>
@@ -4917,13 +5103,13 @@
                     <a:p>
                       <a:pPr algn="l"/>
                       <a:r>
-                        <a:rPr sz="1200" b="0" i="0">
+                        <a:rPr sz="1100" b="0" i="0">
                           <a:solidFill>
                             <a:srgbClr val="2B2B2B"/>
                           </a:solidFill>
                           <a:latin typeface="Calibri"/>
                         </a:rPr>
-                        <a:t>Producto consolidado + metodología + planeación</a:t>
+                        <a:t>Anteproyecto completo e integrado: metodología, instrumentos propuestos, cronograma, presupuesto y viabilidad (guía: «ACA 3»).</a:t>
                       </a:r>
                     </a:p>
                   </a:txBody>
@@ -4942,7 +5128,7 @@
                     <a:p>
                       <a:pPr algn="l"/>
                       <a:r>
-                        <a:rPr sz="1200" b="0" i="0">
+                        <a:rPr sz="1100" b="1" i="0">
                           <a:solidFill>
                             <a:srgbClr val="2B2B2B"/>
                           </a:solidFill>
@@ -4965,7 +5151,53 @@
                     <a:p>
                       <a:pPr algn="l"/>
                       <a:r>
-                        <a:rPr sz="1200" b="0" i="0">
+                        <a:rPr sz="1100" b="0" i="0">
+                          <a:solidFill>
+                            <a:srgbClr val="2B2B2B"/>
+                          </a:solidFill>
+                          <a:latin typeface="Calibri"/>
+                        </a:rPr>
+                        <a:t>Cuestionario</a:t>
+                      </a:r>
+                    </a:p>
+                  </a:txBody>
+                  <a:tcPr anchor="ctr" marL="109728" marR="91440" marT="36576" marB="36576">
+                    <a:solidFill>
+                      <a:srgbClr val="F2F2F2"/>
+                    </a:solidFill>
+                  </a:tcPr>
+                </a:tc>
+                <a:tc>
+                  <a:txBody>
+                    <a:bodyPr/>
+                    <a:lstStyle/>
+                    <a:p>
+                      <a:pPr algn="l"/>
+                      <a:r>
+                        <a:rPr sz="1100" b="0" i="0">
+                          <a:solidFill>
+                            <a:srgbClr val="2B2B2B"/>
+                          </a:solidFill>
+                          <a:latin typeface="Calibri"/>
+                        </a:rPr>
+                        <a:t>3 (50%)</a:t>
+                      </a:r>
+                    </a:p>
+                  </a:txBody>
+                  <a:tcPr anchor="ctr" marL="109728" marR="91440" marT="36576" marB="36576">
+                    <a:solidFill>
+                      <a:srgbClr val="F2F2F2"/>
+                    </a:solidFill>
+                  </a:tcPr>
+                </a:tc>
+                <a:tc>
+                  <a:txBody>
+                    <a:bodyPr/>
+                    <a:lstStyle/>
+                    <a:p>
+                      <a:pPr algn="l"/>
+                      <a:r>
+                        <a:rPr sz="1100" b="1" i="0">
                           <a:solidFill>
                             <a:srgbClr val="2B2B2B"/>
                           </a:solidFill>
@@ -4988,13 +5220,13 @@
                     <a:p>
                       <a:pPr algn="l"/>
                       <a:r>
-                        <a:rPr sz="1200" b="0" i="0">
+                        <a:rPr sz="1100" b="0" i="0">
                           <a:solidFill>
                             <a:srgbClr val="2B2B2B"/>
                           </a:solidFill>
                           <a:latin typeface="Calibri"/>
                         </a:rPr>
-                        <a:t>Individual (cierre)</a:t>
+                        <a:t>Tu valoración de tu propio proceso y de tu aporte al equipo (individual).</a:t>
                       </a:r>
                     </a:p>
                   </a:txBody>
@@ -5013,7 +5245,7 @@
                     <a:p>
                       <a:pPr algn="l"/>
                       <a:r>
-                        <a:rPr sz="1200" b="0" i="0">
+                        <a:rPr sz="1100" b="1" i="0">
                           <a:solidFill>
                             <a:srgbClr val="2B2B2B"/>
                           </a:solidFill>
@@ -5036,7 +5268,53 @@
                     <a:p>
                       <a:pPr algn="l"/>
                       <a:r>
-                        <a:rPr sz="1200" b="0" i="0">
+                        <a:rPr sz="1100" b="0" i="0">
+                          <a:solidFill>
+                            <a:srgbClr val="2B2B2B"/>
+                          </a:solidFill>
+                          <a:latin typeface="Calibri"/>
+                        </a:rPr>
+                        <a:t>Foro</a:t>
+                      </a:r>
+                    </a:p>
+                  </a:txBody>
+                  <a:tcPr anchor="ctr" marL="109728" marR="91440" marT="36576" marB="36576">
+                    <a:solidFill>
+                      <a:srgbClr val="FFFFFF"/>
+                    </a:solidFill>
+                  </a:tcPr>
+                </a:tc>
+                <a:tc>
+                  <a:txBody>
+                    <a:bodyPr/>
+                    <a:lstStyle/>
+                    <a:p>
+                      <a:pPr algn="l"/>
+                      <a:r>
+                        <a:rPr sz="1100" b="0" i="0">
+                          <a:solidFill>
+                            <a:srgbClr val="2B2B2B"/>
+                          </a:solidFill>
+                          <a:latin typeface="Calibri"/>
+                        </a:rPr>
+                        <a:t>3 (50%)</a:t>
+                      </a:r>
+                    </a:p>
+                  </a:txBody>
+                  <a:tcPr anchor="ctr" marL="109728" marR="91440" marT="36576" marB="36576">
+                    <a:solidFill>
+                      <a:srgbClr val="FFFFFF"/>
+                    </a:solidFill>
+                  </a:tcPr>
+                </a:tc>
+                <a:tc>
+                  <a:txBody>
+                    <a:bodyPr/>
+                    <a:lstStyle/>
+                    <a:p>
+                      <a:pPr algn="l"/>
+                      <a:r>
+                        <a:rPr sz="1100" b="1" i="0">
                           <a:solidFill>
                             <a:srgbClr val="2B2B2B"/>
                           </a:solidFill>
@@ -5059,13 +5337,13 @@
                     <a:p>
                       <a:pPr algn="l"/>
                       <a:r>
-                        <a:rPr sz="1200" b="0" i="0">
+                        <a:rPr sz="1100" b="0" i="0">
                           <a:solidFill>
                             <a:srgbClr val="2B2B2B"/>
                           </a:solidFill>
                           <a:latin typeface="Calibri"/>
                         </a:rPr>
-                        <a:t>Individual (cierre)</a:t>
+                        <a:t>Valoración de los aportes de tus pares del equipo: se participa en el foro.</a:t>
                       </a:r>
                     </a:p>
                   </a:txBody>
@@ -5109,7 +5387,61 @@
                 </a:solidFill>
                 <a:latin typeface="Calibri"/>
               </a:rPr>
-              <a:t>Seguimiento formativo de un producto único y acumulativo. Si ACA 3 evidencia correcciones y resultados, el docente puede ajustar favorablemente ACA 1/2 con trazabilidad en CDigital.</a:t>
+              <a:t>Estructura, tipo de actividad y pesos = </a:t>
+            </a:r>
+            <a:r>
+              <a:rPr sz="1200" b="1" i="1">
+                <a:solidFill>
+                  <a:srgbClr val="2B2B2B"/>
+                </a:solidFill>
+                <a:latin typeface="Calibri"/>
+              </a:rPr>
+              <a:t>libro de calificaciones del aula</a:t>
+            </a:r>
+            <a:r>
+              <a:rPr sz="1200" b="0" i="1">
+                <a:solidFill>
+                  <a:srgbClr val="2B2B2B"/>
+                </a:solidFill>
+                <a:latin typeface="Calibri"/>
+              </a:rPr>
+              <a:t>; suman </a:t>
+            </a:r>
+            <a:r>
+              <a:rPr sz="1200" b="1" i="1">
+                <a:solidFill>
+                  <a:srgbClr val="2B2B2B"/>
+                </a:solidFill>
+                <a:latin typeface="Calibri"/>
+              </a:rPr>
+              <a:t>100%</a:t>
+            </a:r>
+            <a:r>
+              <a:rPr sz="1200" b="0" i="1">
+                <a:solidFill>
+                  <a:srgbClr val="2B2B2B"/>
+                </a:solidFill>
+                <a:latin typeface="Calibri"/>
+              </a:rPr>
+              <a:t>. ESP329 declara nota única: el aula la compone en </a:t>
+            </a:r>
+            <a:r>
+              <a:rPr sz="1200" b="1" i="1">
+                <a:solidFill>
+                  <a:srgbClr val="2B2B2B"/>
+                </a:solidFill>
+                <a:latin typeface="Calibri"/>
+              </a:rPr>
+              <a:t>tres cortes (25% / 25% / 50%)</a:t>
+            </a:r>
+            <a:r>
+              <a:rPr sz="1200" b="0" i="1">
+                <a:solidFill>
+                  <a:srgbClr val="2B2B2B"/>
+                </a:solidFill>
+                <a:latin typeface="Calibri"/>
+              </a:rPr>
+              <a:t>. Producto único y acumulativo: si el anteproyecto final evidencia correcciones y resultados, el Docente puede ajustar favorablemente los avances previos, con trazabilidad en CDigital.</a:t>
             </a:r>
           </a:p>
         </p:txBody>
@@ -5297,7 +5629,7 @@
                 </a:solidFill>
                 <a:latin typeface="Calibri"/>
               </a:rPr>
-              <a:t>Aplican solo en Proyecto I</a:t>
+              <a:t>En Proyecto I pesan 4% + 4%</a:t>
             </a:r>
             <a:r>
               <a:rPr sz="1300" b="0" i="0">
@@ -5306,25 +5638,7 @@
                 </a:solidFill>
                 <a:latin typeface="Calibri"/>
               </a:rPr>
-              <a:t> (ESP329 · Art. 41 · cronograma AFI). </a:t>
-            </a:r>
-            <a:r>
-              <a:rPr sz="1300" b="1" i="0">
-                <a:solidFill>
-                  <a:srgbClr val="2B2B2B"/>
-                </a:solidFill>
-                <a:latin typeface="Calibri"/>
-              </a:rPr>
-              <a:t>No</a:t>
-            </a:r>
-            <a:r>
-              <a:rPr sz="1300" b="0" i="0">
-                <a:solidFill>
-                  <a:srgbClr val="2B2B2B"/>
-                </a:solidFill>
-                <a:latin typeface="Calibri"/>
-              </a:rPr>
-              <a:t> en Proyecto II ni en pregrado Art. 52.</a:t>
+              <a:t> (ESP329 · Art. 41 · cronograma AFI), dentro del tercer corte. Existen también en los demás cursos del Docente, con otro peso: lo que cambia es el porcentaje, no el instrumento.</a:t>
             </a:r>
           </a:p>
           <a:p>
@@ -5358,7 +5672,25 @@
                 </a:solidFill>
                 <a:latin typeface="Calibri"/>
               </a:rPr>
-              <a:t> tú valoras tu proceso, aportes al equipo y logro del anteproyecto. Individual y honesta.</a:t>
+              <a:t> tú valoras tu proceso, aportes al equipo y logro del anteproyecto. Individual y honesta. En el aula es un </a:t>
+            </a:r>
+            <a:r>
+              <a:rPr sz="1300" b="1" i="0">
+                <a:solidFill>
+                  <a:srgbClr val="2B2B2B"/>
+                </a:solidFill>
+                <a:latin typeface="Calibri"/>
+              </a:rPr>
+              <a:t>cuestionario</a:t>
+            </a:r>
+            <a:r>
+              <a:rPr sz="1300" b="0" i="0">
+                <a:solidFill>
+                  <a:srgbClr val="2B2B2B"/>
+                </a:solidFill>
+                <a:latin typeface="Calibri"/>
+              </a:rPr>
+              <a:t>.</a:t>
             </a:r>
           </a:p>
           <a:p>
@@ -5392,7 +5724,25 @@
                 </a:solidFill>
                 <a:latin typeface="Calibri"/>
               </a:rPr>
-              <a:t> valoras el trabajo colaborativo / aportes de pares de tu equipo (respeto + criterio académico).</a:t>
+              <a:t> valoras el trabajo colaborativo / aportes de pares de tu equipo (respeto + criterio académico). En el aula es un </a:t>
+            </a:r>
+            <a:r>
+              <a:rPr sz="1300" b="1" i="0">
+                <a:solidFill>
+                  <a:srgbClr val="2B2B2B"/>
+                </a:solidFill>
+                <a:latin typeface="Calibri"/>
+              </a:rPr>
+              <a:t>foro</a:t>
+            </a:r>
+            <a:r>
+              <a:rPr sz="1300" b="0" i="0">
+                <a:solidFill>
+                  <a:srgbClr val="2B2B2B"/>
+                </a:solidFill>
+                <a:latin typeface="Calibri"/>
+              </a:rPr>
+              <a:t>: se participa, no se sube archivo.</a:t>
             </a:r>
           </a:p>
           <a:p>
@@ -5426,7 +5776,7 @@
                 </a:solidFill>
                 <a:latin typeface="Calibri"/>
               </a:rPr>
-              <a:t> actividad individual en </a:t>
+              <a:t> actividades individuales en </a:t>
             </a:r>
             <a:r>
               <a:rPr sz="1300" b="1" i="0">
@@ -5600,7 +5950,25 @@
                 </a:solidFill>
                 <a:latin typeface="Calibri"/>
               </a:rPr>
-              <a:t> completar la actividad en la ventana. No sustituye ACA 3 (anteproyecto).</a:t>
+              <a:t> completar la actividad en la ventana. No sustituye el anteproyecto final (</a:t>
+            </a:r>
+            <a:r>
+              <a:rPr sz="1300" b="1" i="0">
+                <a:solidFill>
+                  <a:srgbClr val="2B2B2B"/>
+                </a:solidFill>
+                <a:latin typeface="Calibri"/>
+              </a:rPr>
+              <a:t>ACA FINAL</a:t>
+            </a:r>
+            <a:r>
+              <a:rPr sz="1300" b="0" i="0">
+                <a:solidFill>
+                  <a:srgbClr val="2B2B2B"/>
+                </a:solidFill>
+                <a:latin typeface="Calibri"/>
+              </a:rPr>
+              <a:t> en el aula).</a:t>
             </a:r>
           </a:p>
         </p:txBody>
@@ -6238,7 +6606,7 @@
         <p:spPr>
           <a:xfrm>
             <a:off x="640080" y="2011679"/>
-            <a:ext cx="2577007" cy="658368"/>
+            <a:ext cx="3503066" cy="658368"/>
           </a:xfrm>
           <a:prstGeom prst="rect">
             <a:avLst/>
@@ -6282,7 +6650,7 @@
         <p:spPr>
           <a:xfrm>
             <a:off x="713231" y="2084831"/>
-            <a:ext cx="2430703" cy="512064"/>
+            <a:ext cx="3356762" cy="512064"/>
           </a:xfrm>
           <a:prstGeom prst="rect">
             <a:avLst/>
@@ -6303,7 +6671,7 @@
                 </a:solidFill>
                 <a:latin typeface="Calibri"/>
               </a:rPr>
-              <a:t>ACA 1  ·  25%</a:t>
+              <a:t>Corte 1  ·  25%</a:t>
             </a:r>
           </a:p>
         </p:txBody>
@@ -6317,7 +6685,7 @@
         <p:spPr>
           <a:xfrm>
             <a:off x="640080" y="2670048"/>
-            <a:ext cx="2577007" cy="2221991"/>
+            <a:ext cx="3503066" cy="2221991"/>
           </a:xfrm>
           <a:prstGeom prst="rect">
             <a:avLst/>
@@ -6361,7 +6729,7 @@
         <p:spPr>
           <a:xfrm>
             <a:off x="749808" y="2880359"/>
-            <a:ext cx="2357551" cy="822960"/>
+            <a:ext cx="3283610" cy="822960"/>
           </a:xfrm>
           <a:prstGeom prst="rect">
             <a:avLst/>
@@ -6412,7 +6780,7 @@
         <p:spPr>
           <a:xfrm>
             <a:off x="960119" y="3794759"/>
-            <a:ext cx="1936927" cy="27432"/>
+            <a:ext cx="2862986" cy="27432"/>
           </a:xfrm>
           <a:prstGeom prst="rect">
             <a:avLst/>
@@ -6456,7 +6824,7 @@
         <p:spPr>
           <a:xfrm>
             <a:off x="749808" y="3977639"/>
-            <a:ext cx="2357551" cy="822960"/>
+            <a:ext cx="3283610" cy="822960"/>
           </a:xfrm>
           <a:prstGeom prst="rect">
             <a:avLst/>
@@ -6506,8 +6874,8 @@
         </p:nvSpPr>
         <p:spPr>
           <a:xfrm>
-            <a:off x="3418255" y="2011679"/>
-            <a:ext cx="2577007" cy="658368"/>
+            <a:off x="4344314" y="2011679"/>
+            <a:ext cx="3503066" cy="658368"/>
           </a:xfrm>
           <a:prstGeom prst="rect">
             <a:avLst/>
@@ -6550,8 +6918,8 @@
         </p:nvSpPr>
         <p:spPr>
           <a:xfrm>
-            <a:off x="3491407" y="2084831"/>
-            <a:ext cx="2430703" cy="512064"/>
+            <a:off x="4417466" y="2084831"/>
+            <a:ext cx="3356762" cy="512064"/>
           </a:xfrm>
           <a:prstGeom prst="rect">
             <a:avLst/>
@@ -6572,7 +6940,7 @@
                 </a:solidFill>
                 <a:latin typeface="Calibri"/>
               </a:rPr>
-              <a:t>ACA 2  ·  25%</a:t>
+              <a:t>Corte 2  ·  25%</a:t>
             </a:r>
           </a:p>
         </p:txBody>
@@ -6585,8 +6953,8 @@
         </p:nvSpPr>
         <p:spPr>
           <a:xfrm>
-            <a:off x="3418255" y="2670048"/>
-            <a:ext cx="2577007" cy="2221991"/>
+            <a:off x="4344314" y="2670048"/>
+            <a:ext cx="3503066" cy="2221991"/>
           </a:xfrm>
           <a:prstGeom prst="rect">
             <a:avLst/>
@@ -6629,8 +6997,8 @@
         </p:nvSpPr>
         <p:spPr>
           <a:xfrm>
-            <a:off x="3527983" y="2880359"/>
-            <a:ext cx="2357551" cy="822960"/>
+            <a:off x="4454042" y="2880359"/>
+            <a:ext cx="3283610" cy="822960"/>
           </a:xfrm>
           <a:prstGeom prst="rect">
             <a:avLst/>
@@ -6680,8 +7048,8 @@
         </p:nvSpPr>
         <p:spPr>
           <a:xfrm>
-            <a:off x="3738295" y="3794759"/>
-            <a:ext cx="1936927" cy="27432"/>
+            <a:off x="4664354" y="3794759"/>
+            <a:ext cx="2862986" cy="27432"/>
           </a:xfrm>
           <a:prstGeom prst="rect">
             <a:avLst/>
@@ -6724,8 +7092,8 @@
         </p:nvSpPr>
         <p:spPr>
           <a:xfrm>
-            <a:off x="3527983" y="3977639"/>
-            <a:ext cx="2357551" cy="822960"/>
+            <a:off x="4454042" y="3977639"/>
+            <a:ext cx="3283610" cy="822960"/>
           </a:xfrm>
           <a:prstGeom prst="rect">
             <a:avLst/>
@@ -6775,8 +7143,8 @@
         </p:nvSpPr>
         <p:spPr>
           <a:xfrm>
-            <a:off x="6196431" y="2011679"/>
-            <a:ext cx="2577007" cy="658368"/>
+            <a:off x="8048548" y="2011679"/>
+            <a:ext cx="3503066" cy="658368"/>
           </a:xfrm>
           <a:prstGeom prst="rect">
             <a:avLst/>
@@ -6819,8 +7187,8 @@
         </p:nvSpPr>
         <p:spPr>
           <a:xfrm>
-            <a:off x="6269583" y="2084831"/>
-            <a:ext cx="2430703" cy="512064"/>
+            <a:off x="8121700" y="2084831"/>
+            <a:ext cx="3356762" cy="512064"/>
           </a:xfrm>
           <a:prstGeom prst="rect">
             <a:avLst/>
@@ -6841,7 +7209,7 @@
                 </a:solidFill>
                 <a:latin typeface="Calibri"/>
               </a:rPr>
-              <a:t>ACA 3  ·  42%</a:t>
+              <a:t>Corte 3  ·  50%</a:t>
             </a:r>
           </a:p>
         </p:txBody>
@@ -6854,8 +7222,8 @@
         </p:nvSpPr>
         <p:spPr>
           <a:xfrm>
-            <a:off x="6196431" y="2670048"/>
-            <a:ext cx="2577007" cy="2221991"/>
+            <a:off x="8048548" y="2670048"/>
+            <a:ext cx="3503066" cy="2221991"/>
           </a:xfrm>
           <a:prstGeom prst="rect">
             <a:avLst/>
@@ -6898,8 +7266,8 @@
         </p:nvSpPr>
         <p:spPr>
           <a:xfrm>
-            <a:off x="6306159" y="2880359"/>
-            <a:ext cx="2357551" cy="822960"/>
+            <a:off x="8158276" y="2880359"/>
+            <a:ext cx="3283610" cy="822960"/>
           </a:xfrm>
           <a:prstGeom prst="rect">
             <a:avLst/>
@@ -6949,8 +7317,8 @@
         </p:nvSpPr>
         <p:spPr>
           <a:xfrm>
-            <a:off x="6516471" y="3794759"/>
-            <a:ext cx="1936927" cy="27432"/>
+            <a:off x="8368588" y="3794759"/>
+            <a:ext cx="2862986" cy="27432"/>
           </a:xfrm>
           <a:prstGeom prst="rect">
             <a:avLst/>
@@ -6993,8 +7361,8 @@
         </p:nvSpPr>
         <p:spPr>
           <a:xfrm>
-            <a:off x="6306159" y="3977639"/>
-            <a:ext cx="2357551" cy="822960"/>
+            <a:off x="8158276" y="3977639"/>
+            <a:ext cx="3283610" cy="822960"/>
           </a:xfrm>
           <a:prstGeom prst="rect">
             <a:avLst/>
@@ -7031,27 +7399,79 @@
                 </a:solidFill>
                 <a:latin typeface="Calibri"/>
               </a:rPr>
-              <a:t>08/11/2026</a:t>
-            </a:r>
-          </a:p>
-        </p:txBody>
-      </p:sp>
-      <p:sp>
-        <p:nvSpPr>
-          <p:cNvPr id="23" name="Rectangle 22"/>
-          <p:cNvSpPr/>
+              <a:t>22/11/2026</a:t>
+            </a:r>
+          </a:p>
+        </p:txBody>
+      </p:sp>
+      <p:sp>
+        <p:nvSpPr>
+          <p:cNvPr id="23" name="TextBox 22"/>
+          <p:cNvSpPr txBox="1"/>
           <p:nvPr/>
         </p:nvSpPr>
         <p:spPr>
           <a:xfrm>
-            <a:off x="8974607" y="2011679"/>
-            <a:ext cx="2577007" cy="658368"/>
+            <a:off x="640080" y="5056631"/>
+            <a:ext cx="10911535" cy="320040"/>
           </a:xfrm>
           <a:prstGeom prst="rect">
             <a:avLst/>
           </a:prstGeom>
+          <a:noFill/>
+        </p:spPr>
+        <p:txBody>
+          <a:bodyPr wrap="square" anchor="t" lIns="0" rIns="0" tIns="0" bIns="0">
+            <a:spAutoFit/>
+          </a:bodyPr>
+          <a:lstStyle/>
+          <a:p>
+            <a:r>
+              <a:rPr sz="1200" b="0" i="0">
+                <a:solidFill>
+                  <a:srgbClr val="C0392B"/>
+                </a:solidFill>
+                <a:latin typeface="Calibri"/>
+              </a:rPr>
+              <a:t>🚫 </a:t>
+            </a:r>
+            <a:r>
+              <a:rPr sz="1200" b="1" i="0">
+                <a:solidFill>
+                  <a:srgbClr val="C0392B"/>
+                </a:solidFill>
+                <a:latin typeface="Calibri"/>
+              </a:rPr>
+              <a:t>Sin clase (festivos):</a:t>
+            </a:r>
+            <a:r>
+              <a:rPr sz="1200" b="0" i="0">
+                <a:solidFill>
+                  <a:srgbClr val="C0392B"/>
+                </a:solidFill>
+                <a:latin typeface="Calibri"/>
+              </a:rPr>
+              <a:t> 17/08 Asunción de la Virgen  ·  12/10 Día de la Raza  ·  02/11 Todos los Santos  ·  16/11 Indep. de Cartagena</a:t>
+            </a:r>
+          </a:p>
+        </p:txBody>
+      </p:sp>
+      <p:sp>
+        <p:nvSpPr>
+          <p:cNvPr id="24" name="Rounded Rectangle 23"/>
+          <p:cNvSpPr/>
+          <p:nvPr/>
+        </p:nvSpPr>
+        <p:spPr>
+          <a:xfrm>
+            <a:off x="640080" y="5404103"/>
+            <a:ext cx="10911535" cy="640080"/>
+          </a:xfrm>
+          <a:prstGeom prst="roundRect">
+            <a:avLst/>
+          </a:prstGeom>
           <a:solidFill>
-            <a:srgbClr val="2E7D5B"/>
+            <a:srgbClr val="FDECD8"/>
           </a:solidFill>
           <a:ln>
             <a:noFill/>
@@ -7082,14 +7502,14 @@
       </p:sp>
       <p:sp>
         <p:nvSpPr>
-          <p:cNvPr id="24" name="TextBox 23"/>
+          <p:cNvPr id="25" name="TextBox 24"/>
           <p:cNvSpPr txBox="1"/>
           <p:nvPr/>
         </p:nvSpPr>
         <p:spPr>
           <a:xfrm>
-            <a:off x="9047759" y="2084831"/>
-            <a:ext cx="2430703" cy="512064"/>
+            <a:off x="822959" y="5513831"/>
+            <a:ext cx="10545775" cy="457200"/>
           </a:xfrm>
           <a:prstGeom prst="rect">
             <a:avLst/>
@@ -7102,342 +7522,21 @@
           </a:bodyPr>
           <a:lstStyle/>
           <a:p>
-            <a:pPr algn="ctr"/>
-            <a:r>
-              <a:rPr sz="1400" b="1" i="0">
-                <a:solidFill>
-                  <a:srgbClr val="FFFFFF"/>
-                </a:solidFill>
-                <a:latin typeface="Calibri"/>
-              </a:rPr>
-              <a:t>Coev. + Autoev.  ·  8%</a:t>
-            </a:r>
-          </a:p>
-        </p:txBody>
-      </p:sp>
-      <p:sp>
-        <p:nvSpPr>
-          <p:cNvPr id="25" name="Rectangle 24"/>
-          <p:cNvSpPr/>
-          <p:nvPr/>
-        </p:nvSpPr>
-        <p:spPr>
-          <a:xfrm>
-            <a:off x="8974607" y="2670048"/>
-            <a:ext cx="2577007" cy="2221991"/>
-          </a:xfrm>
-          <a:prstGeom prst="rect">
-            <a:avLst/>
-          </a:prstGeom>
-          <a:solidFill>
-            <a:srgbClr val="F2F2F2"/>
-          </a:solidFill>
-          <a:ln>
-            <a:noFill/>
-          </a:ln>
-          <a:effectLst/>
-        </p:spPr>
-        <p:style>
-          <a:lnRef idx="1">
-            <a:schemeClr val="accent1"/>
-          </a:lnRef>
-          <a:fillRef idx="3">
-            <a:schemeClr val="accent1"/>
-          </a:fillRef>
-          <a:effectRef idx="2">
-            <a:schemeClr val="accent1"/>
-          </a:effectRef>
-          <a:fontRef idx="minor">
-            <a:schemeClr val="lt1"/>
-          </a:fontRef>
-        </p:style>
-        <p:txBody>
-          <a:bodyPr rtlCol="0" anchor="ctr"/>
-          <a:lstStyle/>
-          <a:p>
-            <a:pPr algn="ctr"/>
+            <a:r>
+              <a:rPr sz="1200" b="0" i="0">
+                <a:solidFill>
+                  <a:srgbClr val="2B2B2B"/>
+                </a:solidFill>
+                <a:latin typeface="Calibri"/>
+              </a:rPr>
+              <a:t>📌 Tutorías → https://forms.gle/oZ8xCYiUo3KEWr1d9</a:t>
+            </a:r>
           </a:p>
         </p:txBody>
       </p:sp>
       <p:sp>
         <p:nvSpPr>
           <p:cNvPr id="26" name="TextBox 25"/>
-          <p:cNvSpPr txBox="1"/>
-          <p:nvPr/>
-        </p:nvSpPr>
-        <p:spPr>
-          <a:xfrm>
-            <a:off x="9084335" y="2880359"/>
-            <a:ext cx="2357551" cy="822960"/>
-          </a:xfrm>
-          <a:prstGeom prst="rect">
-            <a:avLst/>
-          </a:prstGeom>
-          <a:noFill/>
-        </p:spPr>
-        <p:txBody>
-          <a:bodyPr wrap="square" anchor="t" lIns="0" rIns="0" tIns="0" bIns="0">
-            <a:spAutoFit/>
-          </a:bodyPr>
-          <a:lstStyle/>
-          <a:p>
-            <a:pPr algn="ctr"/>
-            <a:r>
-              <a:rPr sz="1100" b="1" i="0">
-                <a:solidFill>
-                  <a:srgbClr val="8F989D"/>
-                </a:solidFill>
-                <a:latin typeface="Calibri"/>
-              </a:rPr>
-              <a:t>INICIO</a:t>
-            </a:r>
-          </a:p>
-          <a:p>
-            <a:pPr algn="ctr">
-              <a:spcBef>
-                <a:spcPts val="400"/>
-              </a:spcBef>
-            </a:pPr>
-            <a:r>
-              <a:rPr sz="2000" b="1" i="0">
-                <a:solidFill>
-                  <a:srgbClr val="007433"/>
-                </a:solidFill>
-                <a:latin typeface="Calibri"/>
-              </a:rPr>
-              <a:t>09/11/2026</a:t>
-            </a:r>
-          </a:p>
-        </p:txBody>
-      </p:sp>
-      <p:sp>
-        <p:nvSpPr>
-          <p:cNvPr id="27" name="Rectangle 26"/>
-          <p:cNvSpPr/>
-          <p:nvPr/>
-        </p:nvSpPr>
-        <p:spPr>
-          <a:xfrm>
-            <a:off x="9294647" y="3794759"/>
-            <a:ext cx="1936927" cy="27432"/>
-          </a:xfrm>
-          <a:prstGeom prst="rect">
-            <a:avLst/>
-          </a:prstGeom>
-          <a:solidFill>
-            <a:srgbClr val="D0D0D0"/>
-          </a:solidFill>
-          <a:ln>
-            <a:noFill/>
-          </a:ln>
-          <a:effectLst/>
-        </p:spPr>
-        <p:style>
-          <a:lnRef idx="1">
-            <a:schemeClr val="accent1"/>
-          </a:lnRef>
-          <a:fillRef idx="3">
-            <a:schemeClr val="accent1"/>
-          </a:fillRef>
-          <a:effectRef idx="2">
-            <a:schemeClr val="accent1"/>
-          </a:effectRef>
-          <a:fontRef idx="minor">
-            <a:schemeClr val="lt1"/>
-          </a:fontRef>
-        </p:style>
-        <p:txBody>
-          <a:bodyPr rtlCol="0" anchor="ctr"/>
-          <a:lstStyle/>
-          <a:p>
-            <a:pPr algn="ctr"/>
-          </a:p>
-        </p:txBody>
-      </p:sp>
-      <p:sp>
-        <p:nvSpPr>
-          <p:cNvPr id="28" name="TextBox 27"/>
-          <p:cNvSpPr txBox="1"/>
-          <p:nvPr/>
-        </p:nvSpPr>
-        <p:spPr>
-          <a:xfrm>
-            <a:off x="9084335" y="3977639"/>
-            <a:ext cx="2357551" cy="822960"/>
-          </a:xfrm>
-          <a:prstGeom prst="rect">
-            <a:avLst/>
-          </a:prstGeom>
-          <a:noFill/>
-        </p:spPr>
-        <p:txBody>
-          <a:bodyPr wrap="square" anchor="t" lIns="0" rIns="0" tIns="0" bIns="0">
-            <a:spAutoFit/>
-          </a:bodyPr>
-          <a:lstStyle/>
-          <a:p>
-            <a:pPr algn="ctr"/>
-            <a:r>
-              <a:rPr sz="1100" b="1" i="0">
-                <a:solidFill>
-                  <a:srgbClr val="8F989D"/>
-                </a:solidFill>
-                <a:latin typeface="Calibri"/>
-              </a:rPr>
-              <a:t>CIERRE</a:t>
-            </a:r>
-          </a:p>
-          <a:p>
-            <a:pPr algn="ctr">
-              <a:spcBef>
-                <a:spcPts val="400"/>
-              </a:spcBef>
-            </a:pPr>
-            <a:r>
-              <a:rPr sz="2000" b="1" i="0">
-                <a:solidFill>
-                  <a:srgbClr val="0C2340"/>
-                </a:solidFill>
-                <a:latin typeface="Calibri"/>
-              </a:rPr>
-              <a:t>22/11/2026</a:t>
-            </a:r>
-          </a:p>
-        </p:txBody>
-      </p:sp>
-      <p:sp>
-        <p:nvSpPr>
-          <p:cNvPr id="29" name="TextBox 28"/>
-          <p:cNvSpPr txBox="1"/>
-          <p:nvPr/>
-        </p:nvSpPr>
-        <p:spPr>
-          <a:xfrm>
-            <a:off x="640080" y="5056631"/>
-            <a:ext cx="10911535" cy="320040"/>
-          </a:xfrm>
-          <a:prstGeom prst="rect">
-            <a:avLst/>
-          </a:prstGeom>
-          <a:noFill/>
-        </p:spPr>
-        <p:txBody>
-          <a:bodyPr wrap="square" anchor="t" lIns="0" rIns="0" tIns="0" bIns="0">
-            <a:spAutoFit/>
-          </a:bodyPr>
-          <a:lstStyle/>
-          <a:p>
-            <a:r>
-              <a:rPr sz="1200" b="0" i="0">
-                <a:solidFill>
-                  <a:srgbClr val="C0392B"/>
-                </a:solidFill>
-                <a:latin typeface="Calibri"/>
-              </a:rPr>
-              <a:t>🚫 </a:t>
-            </a:r>
-            <a:r>
-              <a:rPr sz="1200" b="1" i="0">
-                <a:solidFill>
-                  <a:srgbClr val="C0392B"/>
-                </a:solidFill>
-                <a:latin typeface="Calibri"/>
-              </a:rPr>
-              <a:t>Sin clase (festivos):</a:t>
-            </a:r>
-            <a:r>
-              <a:rPr sz="1200" b="0" i="0">
-                <a:solidFill>
-                  <a:srgbClr val="C0392B"/>
-                </a:solidFill>
-                <a:latin typeface="Calibri"/>
-              </a:rPr>
-              <a:t> 17/08 Asunción de la Virgen  ·  12/10 Día de la Raza  ·  02/11 Todos los Santos  ·  16/11 Indep. de Cartagena</a:t>
-            </a:r>
-          </a:p>
-        </p:txBody>
-      </p:sp>
-      <p:sp>
-        <p:nvSpPr>
-          <p:cNvPr id="30" name="Rounded Rectangle 29"/>
-          <p:cNvSpPr/>
-          <p:nvPr/>
-        </p:nvSpPr>
-        <p:spPr>
-          <a:xfrm>
-            <a:off x="640080" y="5404103"/>
-            <a:ext cx="10911535" cy="640080"/>
-          </a:xfrm>
-          <a:prstGeom prst="roundRect">
-            <a:avLst/>
-          </a:prstGeom>
-          <a:solidFill>
-            <a:srgbClr val="FDECD8"/>
-          </a:solidFill>
-          <a:ln>
-            <a:noFill/>
-          </a:ln>
-          <a:effectLst/>
-        </p:spPr>
-        <p:style>
-          <a:lnRef idx="1">
-            <a:schemeClr val="accent1"/>
-          </a:lnRef>
-          <a:fillRef idx="3">
-            <a:schemeClr val="accent1"/>
-          </a:fillRef>
-          <a:effectRef idx="2">
-            <a:schemeClr val="accent1"/>
-          </a:effectRef>
-          <a:fontRef idx="minor">
-            <a:schemeClr val="lt1"/>
-          </a:fontRef>
-        </p:style>
-        <p:txBody>
-          <a:bodyPr rtlCol="0" anchor="ctr"/>
-          <a:lstStyle/>
-          <a:p>
-            <a:pPr algn="ctr"/>
-          </a:p>
-        </p:txBody>
-      </p:sp>
-      <p:sp>
-        <p:nvSpPr>
-          <p:cNvPr id="31" name="TextBox 30"/>
-          <p:cNvSpPr txBox="1"/>
-          <p:nvPr/>
-        </p:nvSpPr>
-        <p:spPr>
-          <a:xfrm>
-            <a:off x="822959" y="5513831"/>
-            <a:ext cx="10545775" cy="457200"/>
-          </a:xfrm>
-          <a:prstGeom prst="rect">
-            <a:avLst/>
-          </a:prstGeom>
-          <a:noFill/>
-        </p:spPr>
-        <p:txBody>
-          <a:bodyPr wrap="square" anchor="ctr" lIns="0" rIns="0" tIns="0" bIns="0">
-            <a:spAutoFit/>
-          </a:bodyPr>
-          <a:lstStyle/>
-          <a:p>
-            <a:r>
-              <a:rPr sz="1200" b="0" i="0">
-                <a:solidFill>
-                  <a:srgbClr val="2B2B2B"/>
-                </a:solidFill>
-                <a:latin typeface="Calibri"/>
-              </a:rPr>
-              <a:t>📌 Tutorías → https://forms.gle/oZ8xCYiUo3KEWr1d9</a:t>
-            </a:r>
-          </a:p>
-        </p:txBody>
-      </p:sp>
-      <p:sp>
-        <p:nvSpPr>
-          <p:cNvPr id="32" name="TextBox 31"/>
           <p:cNvSpPr txBox="1"/>
           <p:nvPr/>
         </p:nvSpPr>
@@ -7584,7 +7683,7 @@
         <p:spPr>
           <a:xfrm>
             <a:off x="640080" y="1737360"/>
-            <a:ext cx="10911535" cy="969264"/>
+            <a:ext cx="10911535" cy="1225296"/>
           </a:xfrm>
           <a:prstGeom prst="roundRect">
             <a:avLst/>
@@ -7628,7 +7727,7 @@
         <p:spPr>
           <a:xfrm>
             <a:off x="868680" y="1847088"/>
-            <a:ext cx="10454335" cy="749808"/>
+            <a:ext cx="10454335" cy="1005840"/>
           </a:xfrm>
           <a:prstGeom prst="rect">
             <a:avLst/>
@@ -7664,7 +7763,25 @@
                 </a:solidFill>
                 <a:latin typeface="Calibri"/>
               </a:rPr>
-              <a:t>ACA 3 (42%) solo tiene 2 lunes sincrónicos (19/10 y 26/10). Apóyate en tutorías adicionales acordadas en la semana con el Docente y registra cada una en el formulario.</a:t>
+              <a:t>La </a:t>
+            </a:r>
+            <a:r>
+              <a:rPr sz="1300" b="1" i="0">
+                <a:solidFill>
+                  <a:srgbClr val="2B2B2B"/>
+                </a:solidFill>
+                <a:latin typeface="Calibri"/>
+              </a:rPr>
+              <a:t>ACA FINAL</a:t>
+            </a:r>
+            <a:r>
+              <a:rPr sz="1300" b="0" i="0">
+                <a:solidFill>
+                  <a:srgbClr val="2B2B2B"/>
+                </a:solidFill>
+                <a:latin typeface="Calibri"/>
+              </a:rPr>
+              <a:t> (42%, el anteproyecto integrado) solo tiene 2 lunes sincrónicos (19/10 y 26/10). Apóyate en tutorías adicionales acordadas en la semana con el Docente y registra cada una en el formulario.</a:t>
             </a:r>
           </a:p>
         </p:txBody>
@@ -7677,7 +7794,7 @@
         </p:nvSpPr>
         <p:spPr>
           <a:xfrm>
-            <a:off x="640080" y="2935224"/>
+            <a:off x="640080" y="3191256"/>
             <a:ext cx="10911535" cy="969264"/>
           </a:xfrm>
           <a:prstGeom prst="roundRect">
@@ -7721,7 +7838,7 @@
         </p:nvSpPr>
         <p:spPr>
           <a:xfrm>
-            <a:off x="868680" y="3044952"/>
+            <a:off x="868680" y="3300984"/>
             <a:ext cx="10454335" cy="749808"/>
           </a:xfrm>
           <a:prstGeom prst="rect">
@@ -7771,7 +7888,7 @@
         </p:nvSpPr>
         <p:spPr>
           <a:xfrm>
-            <a:off x="640080" y="4133087"/>
+            <a:off x="640080" y="4389120"/>
             <a:ext cx="10911535" cy="969264"/>
           </a:xfrm>
           <a:prstGeom prst="roundRect">
@@ -7815,7 +7932,7 @@
         </p:nvSpPr>
         <p:spPr>
           <a:xfrm>
-            <a:off x="868680" y="4242816"/>
+            <a:off x="868680" y="4498848"/>
             <a:ext cx="10454335" cy="749808"/>
           </a:xfrm>
           <a:prstGeom prst="rect">
@@ -8010,7 +8127,7 @@
                 </a:solidFill>
                 <a:latin typeface="Calibri"/>
               </a:rPr>
-              <a:t>QUÉ ENTREGA CADA EQUIPO EN CADA ACA</a:t>
+              <a:t>QUÉ SE PREPARA EN CADA CORTE (Y CÓMO SE LLAMA EN EL AULA)</a:t>
             </a:r>
           </a:p>
         </p:txBody>
@@ -8025,7 +8142,7 @@
         </p:nvGraphicFramePr>
         <p:xfrm>
           <a:off x="640080" y="1691639"/>
-          <a:ext cx="10911534" cy="2011680"/>
+          <a:ext cx="10911533" cy="2011680"/>
         </p:xfrm>
         <a:graphic>
           <a:graphicData uri="http://schemas.openxmlformats.org/drawingml/2006/table">
@@ -8034,8 +8151,9 @@
                 <a:tableStyleId>{2D5ABB26-0587-4C30-8999-92F81FD0307C}</a:tableStyleId>
               </a:tblPr>
               <a:tblGrid>
-                <a:gridCol w="5455767"/>
-                <a:gridCol w="5455767"/>
+                <a:gridCol w="2384032"/>
+                <a:gridCol w="2200645"/>
+                <a:gridCol w="6326856"/>
               </a:tblGrid>
               <a:tr h="502920">
                 <a:tc>
@@ -8051,7 +8169,30 @@
                           </a:solidFill>
                           <a:latin typeface="Calibri"/>
                         </a:rPr>
-                        <a:t>ACA</a:t>
+                        <a:t>Documento en Recursos/ACAs</a:t>
+                      </a:r>
+                    </a:p>
+                  </a:txBody>
+                  <a:tcPr anchor="ctr" marL="109728" marR="91440" marT="36576" marB="36576">
+                    <a:solidFill>
+                      <a:srgbClr val="0C2340"/>
+                    </a:solidFill>
+                  </a:tcPr>
+                </a:tc>
+                <a:tc>
+                  <a:txBody>
+                    <a:bodyPr/>
+                    <a:lstStyle/>
+                    <a:p>
+                      <a:pPr algn="l"/>
+                      <a:r>
+                        <a:rPr sz="1300" b="1" i="0">
+                          <a:solidFill>
+                            <a:srgbClr val="FFFFFF"/>
+                          </a:solidFill>
+                          <a:latin typeface="Calibri"/>
+                        </a:rPr>
+                        <a:t>Ítem del aula</a:t>
                       </a:r>
                     </a:p>
                   </a:txBody>
@@ -8093,13 +8234,13 @@
                     <a:p>
                       <a:pPr algn="l"/>
                       <a:r>
-                        <a:rPr sz="1200" b="0" i="0">
+                        <a:rPr sz="1100" b="1" i="0">
                           <a:solidFill>
                             <a:srgbClr val="2B2B2B"/>
                           </a:solidFill>
                           <a:latin typeface="Calibri"/>
                         </a:rPr>
-                        <a:t>ACA 1 (25%)</a:t>
+                        <a:t>ACA 1</a:t>
                       </a:r>
                     </a:p>
                   </a:txBody>
@@ -8116,13 +8257,63 @@
                     <a:p>
                       <a:pPr algn="l"/>
                       <a:r>
-                        <a:rPr sz="1200" b="0" i="0">
+                        <a:rPr sz="1100" b="1" i="0">
                           <a:solidFill>
                             <a:srgbClr val="2B2B2B"/>
                           </a:solidFill>
                           <a:latin typeface="Calibri"/>
                         </a:rPr>
-                        <a:t>U2–U3 (+alcances): problema, pregunta, objetivos, justificación, alcances/limitaciones.</a:t>
+                        <a:t>Quiz</a:t>
+                      </a:r>
+                      <a:r>
+                        <a:rPr sz="1100" b="0" i="0">
+                          <a:solidFill>
+                            <a:srgbClr val="2B2B2B"/>
+                          </a:solidFill>
+                          <a:latin typeface="Calibri"/>
+                        </a:rPr>
+                        <a:t> (cuestionario · 25%)</a:t>
+                      </a:r>
+                    </a:p>
+                  </a:txBody>
+                  <a:tcPr anchor="ctr" marL="109728" marR="91440" marT="36576" marB="36576">
+                    <a:solidFill>
+                      <a:srgbClr val="FFFFFF"/>
+                    </a:solidFill>
+                  </a:tcPr>
+                </a:tc>
+                <a:tc>
+                  <a:txBody>
+                    <a:bodyPr/>
+                    <a:lstStyle/>
+                    <a:p>
+                      <a:pPr algn="l"/>
+                      <a:r>
+                        <a:rPr sz="1100" b="0" i="0">
+                          <a:solidFill>
+                            <a:srgbClr val="2B2B2B"/>
+                          </a:solidFill>
+                          <a:latin typeface="Calibri"/>
+                        </a:rPr>
+                        <a:t>U2–U3 (+alcances): problema, pregunta, objetivos, justificación, alcances/limitaciones. Se comprueba en el </a:t>
+                      </a:r>
+                      <a:r>
+                        <a:rPr sz="1100" b="1" i="0">
+                          <a:solidFill>
+                            <a:srgbClr val="2B2B2B"/>
+                          </a:solidFill>
+                          <a:latin typeface="Calibri"/>
+                        </a:rPr>
+                        <a:t>Quiz</a:t>
+                      </a:r>
+                      <a:r>
+                        <a:rPr sz="1100" b="0" i="0">
+                          <a:solidFill>
+                            <a:srgbClr val="2B2B2B"/>
+                          </a:solidFill>
+                          <a:latin typeface="Calibri"/>
+                        </a:rPr>
+                        <a:t> del aula.</a:t>
                       </a:r>
                     </a:p>
                   </a:txBody>
@@ -8141,13 +8332,13 @@
                     <a:p>
                       <a:pPr algn="l"/>
                       <a:r>
-                        <a:rPr sz="1200" b="0" i="0">
+                        <a:rPr sz="1100" b="1" i="0">
                           <a:solidFill>
                             <a:srgbClr val="2B2B2B"/>
                           </a:solidFill>
                           <a:latin typeface="Calibri"/>
                         </a:rPr>
-                        <a:t>ACA 2 (25%)</a:t>
+                        <a:t>ACA 2</a:t>
                       </a:r>
                     </a:p>
                   </a:txBody>
@@ -8164,13 +8355,63 @@
                     <a:p>
                       <a:pPr algn="l"/>
                       <a:r>
-                        <a:rPr sz="1200" b="0" i="0">
+                        <a:rPr sz="1100" b="1" i="0">
                           <a:solidFill>
                             <a:srgbClr val="2B2B2B"/>
                           </a:solidFill>
                           <a:latin typeface="Calibri"/>
                         </a:rPr>
-                        <a:t>U4: correcciones ACA1 + marco referencial (antecedentes, teórico, conceptual, contextual, legal).</a:t>
+                        <a:t>ACA 1</a:t>
+                      </a:r>
+                      <a:r>
+                        <a:rPr sz="1100" b="0" i="0">
+                          <a:solidFill>
+                            <a:srgbClr val="2B2B2B"/>
+                          </a:solidFill>
+                          <a:latin typeface="Calibri"/>
+                        </a:rPr>
+                        <a:t> (tarea · 25%)</a:t>
+                      </a:r>
+                    </a:p>
+                  </a:txBody>
+                  <a:tcPr anchor="ctr" marL="109728" marR="91440" marT="36576" marB="36576">
+                    <a:solidFill>
+                      <a:srgbClr val="F2F2F2"/>
+                    </a:solidFill>
+                  </a:tcPr>
+                </a:tc>
+                <a:tc>
+                  <a:txBody>
+                    <a:bodyPr/>
+                    <a:lstStyle/>
+                    <a:p>
+                      <a:pPr algn="l"/>
+                      <a:r>
+                        <a:rPr sz="1100" b="0" i="0">
+                          <a:solidFill>
+                            <a:srgbClr val="2B2B2B"/>
+                          </a:solidFill>
+                          <a:latin typeface="Calibri"/>
+                        </a:rPr>
+                        <a:t>U4: correcciones + marco referencial (antecedentes, teórico, conceptual, contextual, legal). Se </a:t>
+                      </a:r>
+                      <a:r>
+                        <a:rPr sz="1100" b="1" i="0">
+                          <a:solidFill>
+                            <a:srgbClr val="2B2B2B"/>
+                          </a:solidFill>
+                          <a:latin typeface="Calibri"/>
+                        </a:rPr>
+                        <a:t>sube</a:t>
+                      </a:r>
+                      <a:r>
+                        <a:rPr sz="1100" b="0" i="0">
+                          <a:solidFill>
+                            <a:srgbClr val="2B2B2B"/>
+                          </a:solidFill>
+                          <a:latin typeface="Calibri"/>
+                        </a:rPr>
+                        <a:t> como ACA 1 del aula.</a:t>
                       </a:r>
                     </a:p>
                   </a:txBody>
@@ -8189,13 +8430,13 @@
                     <a:p>
                       <a:pPr algn="l"/>
                       <a:r>
-                        <a:rPr sz="1200" b="0" i="0">
+                        <a:rPr sz="1100" b="1" i="0">
                           <a:solidFill>
                             <a:srgbClr val="2B2B2B"/>
                           </a:solidFill>
                           <a:latin typeface="Calibri"/>
                         </a:rPr>
-                        <a:t>ACA 3 (42%)</a:t>
+                        <a:t>ACA 3</a:t>
                       </a:r>
                     </a:p>
                   </a:txBody>
@@ -8212,13 +8453,63 @@
                     <a:p>
                       <a:pPr algn="l"/>
                       <a:r>
-                        <a:rPr sz="1200" b="0" i="0">
+                        <a:rPr sz="1100" b="1" i="0">
                           <a:solidFill>
                             <a:srgbClr val="2B2B2B"/>
                           </a:solidFill>
                           <a:latin typeface="Calibri"/>
                         </a:rPr>
-                        <a:t>U5–U7: correcciones + metodología + cronograma/presupuesto + anteproyecto FINAL integrado.</a:t>
+                        <a:t>ACA FINAL</a:t>
+                      </a:r>
+                      <a:r>
+                        <a:rPr sz="1100" b="0" i="0">
+                          <a:solidFill>
+                            <a:srgbClr val="2B2B2B"/>
+                          </a:solidFill>
+                          <a:latin typeface="Calibri"/>
+                        </a:rPr>
+                        <a:t> (tarea · 42%)</a:t>
+                      </a:r>
+                    </a:p>
+                  </a:txBody>
+                  <a:tcPr anchor="ctr" marL="109728" marR="91440" marT="36576" marB="36576">
+                    <a:solidFill>
+                      <a:srgbClr val="FFFFFF"/>
+                    </a:solidFill>
+                  </a:tcPr>
+                </a:tc>
+                <a:tc>
+                  <a:txBody>
+                    <a:bodyPr/>
+                    <a:lstStyle/>
+                    <a:p>
+                      <a:pPr algn="l"/>
+                      <a:r>
+                        <a:rPr sz="1100" b="0" i="0">
+                          <a:solidFill>
+                            <a:srgbClr val="2B2B2B"/>
+                          </a:solidFill>
+                          <a:latin typeface="Calibri"/>
+                        </a:rPr>
+                        <a:t>U5–U7: correcciones + metodología + cronograma/presupuesto + anteproyecto FINAL integrado. Se </a:t>
+                      </a:r>
+                      <a:r>
+                        <a:rPr sz="1100" b="1" i="0">
+                          <a:solidFill>
+                            <a:srgbClr val="2B2B2B"/>
+                          </a:solidFill>
+                          <a:latin typeface="Calibri"/>
+                        </a:rPr>
+                        <a:t>sube</a:t>
+                      </a:r>
+                      <a:r>
+                        <a:rPr sz="1100" b="0" i="0">
+                          <a:solidFill>
+                            <a:srgbClr val="2B2B2B"/>
+                          </a:solidFill>
+                          <a:latin typeface="Calibri"/>
+                        </a:rPr>
+                        <a:t> como ACA FINAL.</a:t>
                       </a:r>
                     </a:p>
                   </a:txBody>
@@ -11747,7 +12038,7 @@
                 </a:solidFill>
                 <a:latin typeface="Calibri"/>
               </a:rPr>
-              <a:t>–   ACA 1, 2 y 3 son </a:t>
+              <a:t>–   Los tres cortes trabajan </a:t>
             </a:r>
             <a:r>
               <a:rPr sz="1600" b="1" i="0">
@@ -11756,7 +12047,7 @@
                 </a:solidFill>
                 <a:latin typeface="Calibri"/>
               </a:rPr>
-              <a:t>avances acumulativos del mismo producto</a:t>
+              <a:t>un mismo producto acumulativo</a:t>
             </a:r>
             <a:r>
               <a:rPr sz="1600" b="0" i="0">
@@ -11765,7 +12056,79 @@
                 </a:solidFill>
                 <a:latin typeface="Calibri"/>
               </a:rPr>
-              <a:t> (no tareas aisladas).</a:t>
+              <a:t> (no tareas aisladas): el corte 1 lo comprueba un </a:t>
+            </a:r>
+            <a:r>
+              <a:rPr sz="1600" b="1" i="0">
+                <a:solidFill>
+                  <a:srgbClr val="2B2B2B"/>
+                </a:solidFill>
+                <a:latin typeface="Calibri"/>
+              </a:rPr>
+              <a:t>Quiz</a:t>
+            </a:r>
+            <a:r>
+              <a:rPr sz="1600" b="0" i="0">
+                <a:solidFill>
+                  <a:srgbClr val="2B2B2B"/>
+                </a:solidFill>
+                <a:latin typeface="Calibri"/>
+              </a:rPr>
+              <a:t> en el aula y los cortes 2 y 3 se </a:t>
+            </a:r>
+            <a:r>
+              <a:rPr sz="1600" b="1" i="0">
+                <a:solidFill>
+                  <a:srgbClr val="2B2B2B"/>
+                </a:solidFill>
+                <a:latin typeface="Calibri"/>
+              </a:rPr>
+              <a:t>suben</a:t>
+            </a:r>
+            <a:r>
+              <a:rPr sz="1600" b="0" i="0">
+                <a:solidFill>
+                  <a:srgbClr val="2B2B2B"/>
+                </a:solidFill>
+                <a:latin typeface="Calibri"/>
+              </a:rPr>
+              <a:t> como </a:t>
+            </a:r>
+            <a:r>
+              <a:rPr sz="1600" b="1" i="0">
+                <a:solidFill>
+                  <a:srgbClr val="2B2B2B"/>
+                </a:solidFill>
+                <a:latin typeface="Calibri"/>
+              </a:rPr>
+              <a:t>ACA 1</a:t>
+            </a:r>
+            <a:r>
+              <a:rPr sz="1600" b="0" i="0">
+                <a:solidFill>
+                  <a:srgbClr val="2B2B2B"/>
+                </a:solidFill>
+                <a:latin typeface="Calibri"/>
+              </a:rPr>
+              <a:t> y </a:t>
+            </a:r>
+            <a:r>
+              <a:rPr sz="1600" b="1" i="0">
+                <a:solidFill>
+                  <a:srgbClr val="2B2B2B"/>
+                </a:solidFill>
+                <a:latin typeface="Calibri"/>
+              </a:rPr>
+              <a:t>ACA FINAL</a:t>
+            </a:r>
+            <a:r>
+              <a:rPr sz="1600" b="0" i="0">
+                <a:solidFill>
+                  <a:srgbClr val="2B2B2B"/>
+                </a:solidFill>
+                <a:latin typeface="Calibri"/>
+              </a:rPr>
+              <a:t>.</a:t>
             </a:r>
           </a:p>
           <a:p>

--- a/Especializacion/Proyecto I/Clases/Presentacion del Curso - Proyecto I.pptx
+++ b/Especializacion/Proyecto I/Clases/Presentacion del Curso - Proyecto I.pptx
@@ -4221,7 +4221,7 @@
                 </a:solidFill>
                 <a:latin typeface="Calibri"/>
               </a:rPr>
-              <a:t> — Retroalimentación ACA1 · Antecedentes de investigación.</a:t>
+              <a:t> — Retroalimentación del Quiz · Antecedentes de investigación.</a:t>
             </a:r>
           </a:p>
           <a:p>
@@ -4414,7 +4414,7 @@
                 </a:solidFill>
                 <a:latin typeface="Calibri"/>
               </a:rPr>
-              <a:t> — Población/muestra, técnicas e instrumentos (propuestos).</a:t>
+              <a:t> — Devolución de la ACA 1 · población, muestra e instrumentos propuestos.</a:t>
             </a:r>
           </a:p>
           <a:p>
@@ -4875,7 +4875,7 @@
                           </a:solidFill>
                           <a:latin typeface="Calibri"/>
                         </a:rPr>
-                        <a:t>Comprobación individual en CDigital de las sesiones 02–03: problema, pregunta, objetivos y justificación (guía: documento «ACA 1»).</a:t>
+                        <a:t>Comprobación individual en CDigital de las sesiones 02–03: problema, pregunta, objetivos y justificación. Guía escrita: `Quiz (25%)`.</a:t>
                       </a:r>
                     </a:p>
                   </a:txBody>
@@ -4992,7 +4992,7 @@
                           </a:solidFill>
                           <a:latin typeface="Calibri"/>
                         </a:rPr>
-                        <a:t>Documento del equipo: correcciones + marco referencial — antecedentes, teórico, conceptual, contextual y legal (guía: documento «ACA 2»).</a:t>
+                        <a:t>Documento del equipo: correcciones + marco referencial — antecedentes, teórico, conceptual, contextual y legal. Enunciado: `ACA 1 (25%)`.</a:t>
                       </a:r>
                     </a:p>
                   </a:txBody>
@@ -5109,7 +5109,7 @@
                           </a:solidFill>
                           <a:latin typeface="Calibri"/>
                         </a:rPr>
-                        <a:t>Anteproyecto completo e integrado: metodología, instrumentos propuestos, cronograma, presupuesto y viabilidad (guía: «ACA 3»).</a:t>
+                        <a:t>Anteproyecto completo e integrado: metodología, instrumentos propuestos, cronograma, presupuesto y viabilidad. Enunciado: `ACA FINAL (42%)`.</a:t>
                       </a:r>
                     </a:p>
                   </a:txBody>
@@ -5226,7 +5226,7 @@
                           </a:solidFill>
                           <a:latin typeface="Calibri"/>
                         </a:rPr>
-                        <a:t>Tu valoración de tu propio proceso y de tu aporte al equipo (individual).</a:t>
+                        <a:t>Tu valoración de tu propio proceso y de tu aporte al equipo (individual). Instructivo: `Autoevaluacion individual (4%)`.</a:t>
                       </a:r>
                     </a:p>
                   </a:txBody>
@@ -5343,7 +5343,7 @@
                           </a:solidFill>
                           <a:latin typeface="Calibri"/>
                         </a:rPr>
-                        <a:t>Valoración de los aportes de tus pares del equipo: se participa en el foro.</a:t>
+                        <a:t>Valoración de los aportes de tus pares del equipo: se participa en el foro. Instructivo: `Coevaluacion individual (4%)`.</a:t>
                       </a:r>
                     </a:p>
                   </a:txBody>
@@ -8127,7 +8127,7 @@
                 </a:solidFill>
                 <a:latin typeface="Calibri"/>
               </a:rPr>
-              <a:t>QUÉ SE PREPARA EN CADA CORTE (Y CÓMO SE LLAMA EN EL AULA)</a:t>
+              <a:t>QUÉ SE PREPARA EN CADA CORTE (Y CÓMO SE LLAMA EN CADA SITIO)</a:t>
             </a:r>
           </a:p>
         </p:txBody>
@@ -8151,9 +8151,10 @@
                 <a:tableStyleId>{2D5ABB26-0587-4C30-8999-92F81FD0307C}</a:tableStyleId>
               </a:tblPr>
               <a:tblGrid>
-                <a:gridCol w="2384032"/>
-                <a:gridCol w="2200645"/>
-                <a:gridCol w="6326856"/>
+                <a:gridCol w="1375403"/>
+                <a:gridCol w="1742177"/>
+                <a:gridCol w="3117581"/>
+                <a:gridCol w="4676372"/>
               </a:tblGrid>
               <a:tr h="502920">
                 <a:tc>
@@ -8169,7 +8170,7 @@
                           </a:solidFill>
                           <a:latin typeface="Calibri"/>
                         </a:rPr>
-                        <a:t>Documento en Recursos/ACAs</a:t>
+                        <a:t>En el Syllabus ESP329</a:t>
                       </a:r>
                     </a:p>
                   </a:txBody>
@@ -8192,7 +8193,30 @@
                           </a:solidFill>
                           <a:latin typeface="Calibri"/>
                         </a:rPr>
-                        <a:t>Ítem del aula</a:t>
+                        <a:t>Ítem del aula (CDigital)</a:t>
+                      </a:r>
+                    </a:p>
+                  </a:txBody>
+                  <a:tcPr anchor="ctr" marL="109728" marR="91440" marT="36576" marB="36576">
+                    <a:solidFill>
+                      <a:srgbClr val="0C2340"/>
+                    </a:solidFill>
+                  </a:tcPr>
+                </a:tc>
+                <a:tc>
+                  <a:txBody>
+                    <a:bodyPr/>
+                    <a:lstStyle/>
+                    <a:p>
+                      <a:pPr algn="l"/>
+                      <a:r>
+                        <a:rPr sz="1300" b="1" i="0">
+                          <a:solidFill>
+                            <a:srgbClr val="FFFFFF"/>
+                          </a:solidFill>
+                          <a:latin typeface="Calibri"/>
+                        </a:rPr>
+                        <a:t>Documento en Recursos/ACAs/</a:t>
                       </a:r>
                     </a:p>
                   </a:txBody>
@@ -8273,6 +8297,29 @@
                           <a:latin typeface="Calibri"/>
                         </a:rPr>
                         <a:t> (cuestionario · 25%)</a:t>
+                      </a:r>
+                    </a:p>
+                  </a:txBody>
+                  <a:tcPr anchor="ctr" marL="109728" marR="91440" marT="36576" marB="36576">
+                    <a:solidFill>
+                      <a:srgbClr val="FFFFFF"/>
+                    </a:solidFill>
+                  </a:tcPr>
+                </a:tc>
+                <a:tc>
+                  <a:txBody>
+                    <a:bodyPr/>
+                    <a:lstStyle/>
+                    <a:p>
+                      <a:pPr algn="l"/>
+                      <a:r>
+                        <a:rPr sz="1100" b="0" i="0">
+                          <a:solidFill>
+                            <a:srgbClr val="2B2B2B"/>
+                          </a:solidFill>
+                          <a:latin typeface="Calibri"/>
+                        </a:rPr>
+                        <a:t>`Quiz (25%) - guia del cuestionario.docx`</a:t>
                       </a:r>
                     </a:p>
                   </a:txBody>
@@ -8393,6 +8440,29 @@
                           </a:solidFill>
                           <a:latin typeface="Calibri"/>
                         </a:rPr>
+                        <a:t>`ACA 1 (25%) - Formulacion del problema y fundamentacion referencial.docx`</a:t>
+                      </a:r>
+                    </a:p>
+                  </a:txBody>
+                  <a:tcPr anchor="ctr" marL="109728" marR="91440" marT="36576" marB="36576">
+                    <a:solidFill>
+                      <a:srgbClr val="F2F2F2"/>
+                    </a:solidFill>
+                  </a:tcPr>
+                </a:tc>
+                <a:tc>
+                  <a:txBody>
+                    <a:bodyPr/>
+                    <a:lstStyle/>
+                    <a:p>
+                      <a:pPr algn="l"/>
+                      <a:r>
+                        <a:rPr sz="1100" b="0" i="0">
+                          <a:solidFill>
+                            <a:srgbClr val="2B2B2B"/>
+                          </a:solidFill>
+                          <a:latin typeface="Calibri"/>
+                        </a:rPr>
                         <a:t>U4: correcciones + marco referencial (antecedentes, teórico, conceptual, contextual, legal). Se </a:t>
                       </a:r>
                       <a:r>
@@ -8491,6 +8561,29 @@
                           </a:solidFill>
                           <a:latin typeface="Calibri"/>
                         </a:rPr>
+                        <a:t>`ACA FINAL (42%) - Anteproyecto integrado.docx`</a:t>
+                      </a:r>
+                    </a:p>
+                  </a:txBody>
+                  <a:tcPr anchor="ctr" marL="109728" marR="91440" marT="36576" marB="36576">
+                    <a:solidFill>
+                      <a:srgbClr val="FFFFFF"/>
+                    </a:solidFill>
+                  </a:tcPr>
+                </a:tc>
+                <a:tc>
+                  <a:txBody>
+                    <a:bodyPr/>
+                    <a:lstStyle/>
+                    <a:p>
+                      <a:pPr algn="l"/>
+                      <a:r>
+                        <a:rPr sz="1100" b="0" i="0">
+                          <a:solidFill>
+                            <a:srgbClr val="2B2B2B"/>
+                          </a:solidFill>
+                          <a:latin typeface="Calibri"/>
+                        </a:rPr>
                         <a:t>U5–U7: correcciones + metodología + cronograma/presupuesto + anteproyecto FINAL integrado. Se </a:t>
                       </a:r>
                       <a:r>
@@ -8553,7 +8646,25 @@
                 </a:solidFill>
                 <a:latin typeface="Calibri"/>
               </a:rPr>
-              <a:t>Equipos máx. 3 (AFI). Formato: Plantilla APA CUN – Proyecto de Grado (APA 7). Criterios: coherencia, pertinencia, rigor, fuentes, escritura, integridad y viabilidad (ESP329).</a:t>
+              <a:t>Tres nombres para lo mismo: el Syllabus numera las ACAs, el aula califica </a:t>
+            </a:r>
+            <a:r>
+              <a:rPr sz="1200" b="1" i="1">
+                <a:solidFill>
+                  <a:srgbClr val="2B2B2B"/>
+                </a:solidFill>
+                <a:latin typeface="Calibri"/>
+              </a:rPr>
+              <a:t>Quiz · ACA 1 · ACA FINAL</a:t>
+            </a:r>
+            <a:r>
+              <a:rPr sz="1200" b="0" i="1">
+                <a:solidFill>
+                  <a:srgbClr val="2B2B2B"/>
+                </a:solidFill>
+                <a:latin typeface="Calibri"/>
+              </a:rPr>
+              <a:t> y tu carpeta titula cada documento como su ítem. Busca siempre por el nombre de la tercera columna. Equipos máx. 3 (AFI). Formato: Plantilla APA CUN – Proyecto de Grado (APA 7). Criterios: coherencia, pertinencia, rigor, fuentes, escritura, integridad y viabilidad (ESP329).</a:t>
             </a:r>
           </a:p>
         </p:txBody>
@@ -8988,7 +9099,7 @@
                 </a:solidFill>
                 <a:latin typeface="Calibri"/>
               </a:rPr>
-              <a:t>Enunciados ACA (estudiantes):</a:t>
+              <a:t>Enunciados y guías:</a:t>
             </a:r>
             <a:r>
               <a:rPr sz="1600" b="0" i="0">
@@ -8997,7 +9108,7 @@
                 </a:solidFill>
                 <a:latin typeface="Calibri"/>
               </a:rPr>
-              <a:t> `Clases/Recursos/ACAs/ (enunciados ACA 1–3 · autoevaluación · coevaluación)`</a:t>
+              <a:t> `Clases/Recursos/ACAs/` — un documento por ítem del aula, con su nombre y su peso.</a:t>
             </a:r>
           </a:p>
           <a:p>

--- a/Especializacion/Proyecto I/Clases/Presentacion del Curso - Proyecto I.pptx
+++ b/Especializacion/Proyecto I/Clases/Presentacion del Curso - Proyecto I.pptx
@@ -8837,7 +8837,7 @@
               </a:spcAft>
             </a:pPr>
             <a:r>
-              <a:rPr sz="1600" b="0" i="0">
+              <a:rPr sz="1500" b="0" i="0">
                 <a:solidFill>
                   <a:srgbClr val="2B2B2B"/>
                 </a:solidFill>
@@ -8846,7 +8846,7 @@
               <a:t>–   </a:t>
             </a:r>
             <a:r>
-              <a:rPr sz="1600" b="1" i="0">
+              <a:rPr sz="1500" b="1" i="0">
                 <a:solidFill>
                   <a:srgbClr val="2B2B2B"/>
                 </a:solidFill>
@@ -8855,7 +8855,7 @@
               <a:t>Contacto del Docente:</a:t>
             </a:r>
             <a:r>
-              <a:rPr sz="1600" b="0" i="0">
+              <a:rPr sz="1500" b="0" i="0">
                 <a:solidFill>
                   <a:srgbClr val="2B2B2B"/>
                 </a:solidFill>
@@ -8871,7 +8871,7 @@
               </a:spcAft>
             </a:pPr>
             <a:r>
-              <a:rPr sz="1600" b="0" i="0">
+              <a:rPr sz="1500" b="0" i="0">
                 <a:solidFill>
                   <a:srgbClr val="2B2B2B"/>
                 </a:solidFill>
@@ -8880,7 +8880,7 @@
               <a:t>–   </a:t>
             </a:r>
             <a:r>
-              <a:rPr sz="1600" b="1" i="0">
+              <a:rPr sz="1500" b="1" i="0">
                 <a:solidFill>
                   <a:srgbClr val="2B2B2B"/>
                 </a:solidFill>
@@ -8889,7 +8889,7 @@
               <a:t>CDigital (campus del curso):</a:t>
             </a:r>
             <a:r>
-              <a:rPr sz="1600" b="0" i="0">
+              <a:rPr sz="1500" b="0" i="0">
                 <a:solidFill>
                   <a:srgbClr val="2B2B2B"/>
                 </a:solidFill>
@@ -8898,7 +8898,7 @@
               <a:t> </a:t>
             </a:r>
             <a:r>
-              <a:rPr sz="1600" b="1" i="0">
+              <a:rPr sz="1500" b="1" i="0">
                 <a:solidFill>
                   <a:srgbClr val="2B2B2B"/>
                 </a:solidFill>
@@ -8914,7 +8914,7 @@
               </a:spcAft>
             </a:pPr>
             <a:r>
-              <a:rPr sz="1600" b="0" i="0">
+              <a:rPr sz="1500" b="0" i="0">
                 <a:solidFill>
                   <a:srgbClr val="2B2B2B"/>
                 </a:solidFill>
@@ -8923,7 +8923,7 @@
               <a:t>–   </a:t>
             </a:r>
             <a:r>
-              <a:rPr sz="1600" b="1" i="0">
+              <a:rPr sz="1500" b="1" i="0">
                 <a:solidFill>
                   <a:srgbClr val="2B2B2B"/>
                 </a:solidFill>
@@ -8932,7 +8932,7 @@
               <a:t>Registro de tutorías (obligatorio):</a:t>
             </a:r>
             <a:r>
-              <a:rPr sz="1600" b="0" i="0">
+              <a:rPr sz="1500" b="0" i="0">
                 <a:solidFill>
                   <a:srgbClr val="2B2B2B"/>
                 </a:solidFill>
@@ -8941,7 +8941,7 @@
               <a:t> </a:t>
             </a:r>
             <a:r>
-              <a:rPr sz="1600" b="1" i="0">
+              <a:rPr sz="1500" b="1" i="0">
                 <a:solidFill>
                   <a:srgbClr val="007433"/>
                 </a:solidFill>
@@ -8957,7 +8957,7 @@
               </a:spcAft>
             </a:pPr>
             <a:r>
-              <a:rPr sz="1600" b="0" i="0">
+              <a:rPr sz="1500" b="0" i="0">
                 <a:solidFill>
                   <a:srgbClr val="2B2B2B"/>
                 </a:solidFill>
@@ -8973,7 +8973,7 @@
               </a:spcAft>
             </a:pPr>
             <a:r>
-              <a:rPr sz="1600" b="0" i="0">
+              <a:rPr sz="1500" b="0" i="0">
                 <a:solidFill>
                   <a:srgbClr val="2B2B2B"/>
                 </a:solidFill>
@@ -8982,7 +8982,7 @@
               <a:t>–   </a:t>
             </a:r>
             <a:r>
-              <a:rPr sz="1600" b="1" i="0">
+              <a:rPr sz="1500" b="1" i="0">
                 <a:solidFill>
                   <a:srgbClr val="2B2B2B"/>
                 </a:solidFill>
@@ -8991,7 +8991,7 @@
               <a:t>Google Meet (mismo enlace toda la serie):</a:t>
             </a:r>
             <a:r>
-              <a:rPr sz="1600" b="0" i="0">
+              <a:rPr sz="1500" b="0" i="0">
                 <a:solidFill>
                   <a:srgbClr val="2B2B2B"/>
                 </a:solidFill>
@@ -9000,7 +9000,7 @@
               <a:t> </a:t>
             </a:r>
             <a:r>
-              <a:rPr sz="1600" b="1" i="0">
+              <a:rPr sz="1500" b="1" i="0">
                 <a:solidFill>
                   <a:srgbClr val="2B2B2B"/>
                 </a:solidFill>
@@ -9016,7 +9016,7 @@
               </a:spcAft>
             </a:pPr>
             <a:r>
-              <a:rPr sz="1600" b="0" i="0">
+              <a:rPr sz="1500" b="0" i="0">
                 <a:solidFill>
                   <a:srgbClr val="2B2B2B"/>
                 </a:solidFill>
@@ -9025,22 +9025,31 @@
               <a:t>–   </a:t>
             </a:r>
             <a:r>
-              <a:rPr sz="1600" b="1" i="0">
-                <a:solidFill>
-                  <a:srgbClr val="2B2B2B"/>
-                </a:solidFill>
-                <a:latin typeface="Calibri"/>
-              </a:rPr>
-              <a:t>Plantilla APA CUN – Proyecto de Grado</a:t>
-            </a:r>
-            <a:r>
-              <a:rPr sz="1600" b="0" i="0">
-                <a:solidFill>
-                  <a:srgbClr val="2B2B2B"/>
-                </a:solidFill>
-                <a:latin typeface="Calibri"/>
-              </a:rPr>
-              <a:t> (viene en tu carpeta del curso): `Recursos/Plantilla_APA_CUN_Proyecto de grado.docx`.</a:t>
+              <a:rPr sz="1500" b="1" i="0">
+                <a:solidFill>
+                  <a:srgbClr val="2B2B2B"/>
+                </a:solidFill>
+                <a:latin typeface="Calibri"/>
+              </a:rPr>
+              <a:t>Material de clases (Drive):</a:t>
+            </a:r>
+            <a:r>
+              <a:rPr sz="1500" b="0" i="0">
+                <a:solidFill>
+                  <a:srgbClr val="2B2B2B"/>
+                </a:solidFill>
+                <a:latin typeface="Calibri"/>
+              </a:rPr>
+              <a:t> </a:t>
+            </a:r>
+            <a:r>
+              <a:rPr sz="1500" b="1" i="0">
+                <a:solidFill>
+                  <a:srgbClr val="2B2B2B"/>
+                </a:solidFill>
+                <a:latin typeface="Calibri"/>
+              </a:rPr>
+              <a:t>[URL Material de clases — carpeta Clases/ en Drive · Proyecto I]</a:t>
             </a:r>
           </a:p>
           <a:p>
@@ -9050,7 +9059,7 @@
               </a:spcAft>
             </a:pPr>
             <a:r>
-              <a:rPr sz="1600" b="0" i="0">
+              <a:rPr sz="1500" b="0" i="0">
                 <a:solidFill>
                   <a:srgbClr val="2B2B2B"/>
                 </a:solidFill>
@@ -9059,22 +9068,22 @@
               <a:t>–   </a:t>
             </a:r>
             <a:r>
-              <a:rPr sz="1600" b="1" i="0">
-                <a:solidFill>
-                  <a:srgbClr val="2B2B2B"/>
-                </a:solidFill>
-                <a:latin typeface="Calibri"/>
-              </a:rPr>
-              <a:t>Plantilla APA CUN (en tu carpeta):</a:t>
-            </a:r>
-            <a:r>
-              <a:rPr sz="1600" b="0" i="0">
-                <a:solidFill>
-                  <a:srgbClr val="2B2B2B"/>
-                </a:solidFill>
-                <a:latin typeface="Calibri"/>
-              </a:rPr>
-              <a:t> `Recursos/Plantilla_APA_CUN_Proyecto de grado.docx`</a:t>
+              <a:rPr sz="1500" b="1" i="0">
+                <a:solidFill>
+                  <a:srgbClr val="2B2B2B"/>
+                </a:solidFill>
+                <a:latin typeface="Calibri"/>
+              </a:rPr>
+              <a:t>Plantilla APA CUN – Proyecto de Grado</a:t>
+            </a:r>
+            <a:r>
+              <a:rPr sz="1500" b="0" i="0">
+                <a:solidFill>
+                  <a:srgbClr val="2B2B2B"/>
+                </a:solidFill>
+                <a:latin typeface="Calibri"/>
+              </a:rPr>
+              <a:t> (viene en tu carpeta del curso): `Recursos/Plantilla_APA_CUN_Proyecto de grado.docx`.</a:t>
             </a:r>
           </a:p>
           <a:p>
@@ -9084,7 +9093,7 @@
               </a:spcAft>
             </a:pPr>
             <a:r>
-              <a:rPr sz="1600" b="0" i="0">
+              <a:rPr sz="1500" b="0" i="0">
                 <a:solidFill>
                   <a:srgbClr val="2B2B2B"/>
                 </a:solidFill>
@@ -9093,22 +9102,22 @@
               <a:t>–   </a:t>
             </a:r>
             <a:r>
-              <a:rPr sz="1600" b="1" i="0">
-                <a:solidFill>
-                  <a:srgbClr val="2B2B2B"/>
-                </a:solidFill>
-                <a:latin typeface="Calibri"/>
-              </a:rPr>
-              <a:t>Enunciados y guías:</a:t>
-            </a:r>
-            <a:r>
-              <a:rPr sz="1600" b="0" i="0">
-                <a:solidFill>
-                  <a:srgbClr val="2B2B2B"/>
-                </a:solidFill>
-                <a:latin typeface="Calibri"/>
-              </a:rPr>
-              <a:t> `Clases/Recursos/ACAs/` — un documento por ítem del aula, con su nombre y su peso.</a:t>
+              <a:rPr sz="1500" b="1" i="0">
+                <a:solidFill>
+                  <a:srgbClr val="2B2B2B"/>
+                </a:solidFill>
+                <a:latin typeface="Calibri"/>
+              </a:rPr>
+              <a:t>Plantilla APA CUN (en tu carpeta):</a:t>
+            </a:r>
+            <a:r>
+              <a:rPr sz="1500" b="0" i="0">
+                <a:solidFill>
+                  <a:srgbClr val="2B2B2B"/>
+                </a:solidFill>
+                <a:latin typeface="Calibri"/>
+              </a:rPr>
+              <a:t> `Recursos/Plantilla_APA_CUN_Proyecto de grado.docx`</a:t>
             </a:r>
           </a:p>
           <a:p>
@@ -9118,7 +9127,7 @@
               </a:spcAft>
             </a:pPr>
             <a:r>
-              <a:rPr sz="1600" b="0" i="0">
+              <a:rPr sz="1500" b="0" i="0">
                 <a:solidFill>
                   <a:srgbClr val="2B2B2B"/>
                 </a:solidFill>
@@ -9127,22 +9136,22 @@
               <a:t>–   </a:t>
             </a:r>
             <a:r>
-              <a:rPr sz="1600" b="1" i="0">
-                <a:solidFill>
-                  <a:srgbClr val="2B2B2B"/>
-                </a:solidFill>
-                <a:latin typeface="Calibri"/>
-              </a:rPr>
-              <a:t>Biblioteca Virtual CUN + bases:</a:t>
-            </a:r>
-            <a:r>
-              <a:rPr sz="1600" b="0" i="0">
-                <a:solidFill>
-                  <a:srgbClr val="2B2B2B"/>
-                </a:solidFill>
-                <a:latin typeface="Calibri"/>
-              </a:rPr>
-              <a:t> Google Scholar, Redalyc, SciELO, Dialnet · citas: ZoteroBib / Google Docs.</a:t>
+              <a:rPr sz="1500" b="1" i="0">
+                <a:solidFill>
+                  <a:srgbClr val="2B2B2B"/>
+                </a:solidFill>
+                <a:latin typeface="Calibri"/>
+              </a:rPr>
+              <a:t>Enunciados y guías:</a:t>
+            </a:r>
+            <a:r>
+              <a:rPr sz="1500" b="0" i="0">
+                <a:solidFill>
+                  <a:srgbClr val="2B2B2B"/>
+                </a:solidFill>
+                <a:latin typeface="Calibri"/>
+              </a:rPr>
+              <a:t> `Clases/Recursos/ACAs/` — un documento por ítem del aula, con su nombre y su peso.</a:t>
             </a:r>
           </a:p>
           <a:p>
@@ -9152,7 +9161,7 @@
               </a:spcAft>
             </a:pPr>
             <a:r>
-              <a:rPr sz="1600" b="0" i="0">
+              <a:rPr sz="1500" b="0" i="0">
                 <a:solidFill>
                   <a:srgbClr val="2B2B2B"/>
                 </a:solidFill>
@@ -9161,7 +9170,41 @@
               <a:t>–   </a:t>
             </a:r>
             <a:r>
-              <a:rPr sz="1600" b="1" i="0">
+              <a:rPr sz="1500" b="1" i="0">
+                <a:solidFill>
+                  <a:srgbClr val="2B2B2B"/>
+                </a:solidFill>
+                <a:latin typeface="Calibri"/>
+              </a:rPr>
+              <a:t>Biblioteca Virtual CUN + bases:</a:t>
+            </a:r>
+            <a:r>
+              <a:rPr sz="1500" b="0" i="0">
+                <a:solidFill>
+                  <a:srgbClr val="2B2B2B"/>
+                </a:solidFill>
+                <a:latin typeface="Calibri"/>
+              </a:rPr>
+              <a:t> Google Scholar, Redalyc, SciELO, Dialnet · citas: ZoteroBib / Google Docs.</a:t>
+            </a:r>
+          </a:p>
+          <a:p>
+            <a:pPr>
+              <a:spcAft>
+                <a:spcPts val="1000"/>
+              </a:spcAft>
+            </a:pPr>
+            <a:r>
+              <a:rPr sz="1500" b="0" i="0">
+                <a:solidFill>
+                  <a:srgbClr val="2B2B2B"/>
+                </a:solidFill>
+                <a:latin typeface="Calibri"/>
+              </a:rPr>
+              <a:t>–   </a:t>
+            </a:r>
+            <a:r>
+              <a:rPr sz="1500" b="1" i="0">
                 <a:solidFill>
                   <a:srgbClr val="2B2B2B"/>
                 </a:solidFill>
@@ -9170,7 +9213,7 @@
               <a:t>Syllabus fuente:</a:t>
             </a:r>
             <a:r>
-              <a:rPr sz="1600" b="0" i="0">
+              <a:rPr sz="1500" b="0" i="0">
                 <a:solidFill>
                   <a:srgbClr val="2B2B2B"/>
                 </a:solidFill>
@@ -9929,7 +9972,7 @@
                 </a:solidFill>
                 <a:latin typeface="Calibri"/>
               </a:rPr>
-              <a:t>Tablero colaborativo (Padlet)</a:t>
+              <a:t>Formulario de Google · encuestas y Q&amp;A en el propio Meet</a:t>
             </a:r>
           </a:p>
         </p:txBody>
@@ -9962,7 +10005,7 @@
               </a:spcAft>
             </a:pPr>
             <a:r>
-              <a:rPr sz="1400" b="0" i="0">
+              <a:rPr sz="1300" b="0" i="0">
                 <a:solidFill>
                   <a:srgbClr val="2B2B2B"/>
                 </a:solidFill>
@@ -9971,22 +10014,22 @@
               <a:t>–   </a:t>
             </a:r>
             <a:r>
-              <a:rPr sz="1400" b="1" i="0">
-                <a:solidFill>
-                  <a:srgbClr val="2B2B2B"/>
-                </a:solidFill>
-                <a:latin typeface="Calibri"/>
-              </a:rPr>
-              <a:t>Escanea o abre:</a:t>
-            </a:r>
-            <a:r>
-              <a:rPr sz="1400" b="0" i="0">
-                <a:solidFill>
-                  <a:srgbClr val="2B2B2B"/>
-                </a:solidFill>
-                <a:latin typeface="Calibri"/>
-              </a:rPr>
-              <a:t> https://padlet.com/andres_dfx/cun-wruz81hmf9k06gd7</a:t>
+              <a:rPr sz="1300" b="1" i="0">
+                <a:solidFill>
+                  <a:srgbClr val="2B2B2B"/>
+                </a:solidFill>
+                <a:latin typeface="Calibri"/>
+              </a:rPr>
+              <a:t>Escanea el QR o abre:</a:t>
+            </a:r>
+            <a:r>
+              <a:rPr sz="1300" b="0" i="0">
+                <a:solidFill>
+                  <a:srgbClr val="2B2B2B"/>
+                </a:solidFill>
+                <a:latin typeface="Calibri"/>
+              </a:rPr>
+              <a:t> [URL Formulario Preséntate — pendiente · PROYECTO I]</a:t>
             </a:r>
           </a:p>
           <a:p>
@@ -9996,16 +10039,34 @@
               </a:spcAft>
             </a:pPr>
             <a:r>
-              <a:rPr sz="1400" b="0" i="0">
-                <a:solidFill>
-                  <a:srgbClr val="2B2B2B"/>
-                </a:solidFill>
-                <a:latin typeface="Calibri"/>
-              </a:rPr>
-              <a:t>–   Post-it: </a:t>
-            </a:r>
-            <a:r>
-              <a:rPr sz="1400" b="1" i="0">
+              <a:rPr sz="1300" b="0" i="0">
+                <a:solidFill>
+                  <a:srgbClr val="2B2B2B"/>
+                </a:solidFill>
+                <a:latin typeface="Calibri"/>
+              </a:rPr>
+              <a:t>–   </a:t>
+            </a:r>
+            <a:r>
+              <a:rPr sz="1300" b="1" i="0">
+                <a:solidFill>
+                  <a:srgbClr val="2B2B2B"/>
+                </a:solidFill>
+                <a:latin typeface="Calibri"/>
+              </a:rPr>
+              <a:t>Qué respondes (1 min):</a:t>
+            </a:r>
+            <a:r>
+              <a:rPr sz="1300" b="0" i="0">
+                <a:solidFill>
+                  <a:srgbClr val="2B2B2B"/>
+                </a:solidFill>
+                <a:latin typeface="Calibri"/>
+              </a:rPr>
+              <a:t> tu </a:t>
+            </a:r>
+            <a:r>
+              <a:rPr sz="1300" b="1" i="0">
                 <a:solidFill>
                   <a:srgbClr val="2B2B2B"/>
                 </a:solidFill>
@@ -10014,7 +10075,7 @@
               <a:t>nombre</a:t>
             </a:r>
             <a:r>
-              <a:rPr sz="1400" b="0" i="0">
+              <a:rPr sz="1300" b="0" i="0">
                 <a:solidFill>
                   <a:srgbClr val="2B2B2B"/>
                 </a:solidFill>
@@ -10023,7 +10084,7 @@
               <a:t> + </a:t>
             </a:r>
             <a:r>
-              <a:rPr sz="1400" b="1" i="0">
+              <a:rPr sz="1300" b="1" i="0">
                 <a:solidFill>
                   <a:srgbClr val="2B2B2B"/>
                 </a:solidFill>
@@ -10032,16 +10093,16 @@
               <a:t>expectativa del curso</a:t>
             </a:r>
             <a:r>
-              <a:rPr sz="1400" b="0" i="0">
-                <a:solidFill>
-                  <a:srgbClr val="2B2B2B"/>
-                </a:solidFill>
-                <a:latin typeface="Calibri"/>
-              </a:rPr>
-              <a:t> + </a:t>
-            </a:r>
-            <a:r>
-              <a:rPr sz="1400" b="1" i="0">
+              <a:rPr sz="1300" b="0" i="0">
+                <a:solidFill>
+                  <a:srgbClr val="2B2B2B"/>
+                </a:solidFill>
+                <a:latin typeface="Calibri"/>
+              </a:rPr>
+              <a:t> + un </a:t>
+            </a:r>
+            <a:r>
+              <a:rPr sz="1300" b="1" i="0">
                 <a:solidFill>
                   <a:srgbClr val="2B2B2B"/>
                 </a:solidFill>
@@ -10050,13 +10111,31 @@
               <a:t>tema tentativo</a:t>
             </a:r>
             <a:r>
-              <a:rPr sz="1400" b="0" i="0">
-                <a:solidFill>
-                  <a:srgbClr val="2B2B2B"/>
-                </a:solidFill>
-                <a:latin typeface="Calibri"/>
-              </a:rPr>
-              <a:t> de investigación (1 frase).</a:t>
+              <a:rPr sz="1300" b="0" i="0">
+                <a:solidFill>
+                  <a:srgbClr val="2B2B2B"/>
+                </a:solidFill>
+                <a:latin typeface="Calibri"/>
+              </a:rPr>
+              <a:t> de investigación (1 frase). Entras con tu correo </a:t>
+            </a:r>
+            <a:r>
+              <a:rPr sz="1300" b="1" i="0">
+                <a:solidFill>
+                  <a:srgbClr val="2B2B2B"/>
+                </a:solidFill>
+                <a:latin typeface="Calibri"/>
+              </a:rPr>
+              <a:t>@cun.edu.co</a:t>
+            </a:r>
+            <a:r>
+              <a:rPr sz="1300" b="0" i="0">
+                <a:solidFill>
+                  <a:srgbClr val="2B2B2B"/>
+                </a:solidFill>
+                <a:latin typeface="Calibri"/>
+              </a:rPr>
+              <a:t>: no hay que crear cuenta ni instalar nada.</a:t>
             </a:r>
           </a:p>
           <a:p>
@@ -10066,31 +10145,31 @@
               </a:spcAft>
             </a:pPr>
             <a:r>
-              <a:rPr sz="1400" b="0" i="0">
-                <a:solidFill>
-                  <a:srgbClr val="2B2B2B"/>
-                </a:solidFill>
-                <a:latin typeface="Calibri"/>
-              </a:rPr>
-              <a:t>–   Tablero oficial: </a:t>
-            </a:r>
-            <a:r>
-              <a:rPr sz="1400" b="1" i="0">
-                <a:solidFill>
-                  <a:srgbClr val="2B2B2B"/>
-                </a:solidFill>
-                <a:latin typeface="Calibri"/>
-              </a:rPr>
-              <a:t>Padlet</a:t>
-            </a:r>
-            <a:r>
-              <a:rPr sz="1400" b="0" i="0">
-                <a:solidFill>
-                  <a:srgbClr val="2B2B2B"/>
-                </a:solidFill>
-                <a:latin typeface="Calibri"/>
-              </a:rPr>
-              <a:t> (mismo enlace en los 5 cursos).</a:t>
+              <a:rPr sz="1300" b="0" i="0">
+                <a:solidFill>
+                  <a:srgbClr val="2B2B2B"/>
+                </a:solidFill>
+                <a:latin typeface="Calibri"/>
+              </a:rPr>
+              <a:t>–   </a:t>
+            </a:r>
+            <a:r>
+              <a:rPr sz="1300" b="1" i="0">
+                <a:solidFill>
+                  <a:srgbClr val="2B2B2B"/>
+                </a:solidFill>
+                <a:latin typeface="Calibri"/>
+              </a:rPr>
+              <a:t>Ahora, ~3 min.</a:t>
+            </a:r>
+            <a:r>
+              <a:rPr sz="1300" b="0" i="0">
+                <a:solidFill>
+                  <a:srgbClr val="2B2B2B"/>
+                </a:solidFill>
+                <a:latin typeface="Calibri"/>
+              </a:rPr>
+              <a:t> Somos 50: no alcanzamos a presentarnos uno por uno, así que el formulario nos ordena.</a:t>
             </a:r>
           </a:p>
           <a:p>
@@ -10100,13 +10179,171 @@
               </a:spcAft>
             </a:pPr>
             <a:r>
-              <a:rPr sz="1400" b="0" i="0">
-                <a:solidFill>
-                  <a:srgbClr val="2B2B2B"/>
-                </a:solidFill>
-                <a:latin typeface="Calibri"/>
-              </a:rPr>
-              <a:t>–   Ahora (~7 min). Leemos juntos 3–4 notas (sin juzgar).</a:t>
+              <a:rPr sz="1300" b="0" i="0">
+                <a:solidFill>
+                  <a:srgbClr val="2B2B2B"/>
+                </a:solidFill>
+                <a:latin typeface="Calibri"/>
+              </a:rPr>
+              <a:t>–   </a:t>
+            </a:r>
+            <a:r>
+              <a:rPr sz="1300" b="1" i="0">
+                <a:solidFill>
+                  <a:srgbClr val="2B2B2B"/>
+                </a:solidFill>
+                <a:latin typeface="Calibri"/>
+              </a:rPr>
+              <a:t>Con eso, hoy:</a:t>
+            </a:r>
+            <a:r>
+              <a:rPr sz="1300" b="0" i="0">
+                <a:solidFill>
+                  <a:srgbClr val="2B2B2B"/>
+                </a:solidFill>
+                <a:latin typeface="Calibri"/>
+              </a:rPr>
+              <a:t> el Docente lee en voz alta </a:t>
+            </a:r>
+            <a:r>
+              <a:rPr sz="1300" b="1" i="0">
+                <a:solidFill>
+                  <a:srgbClr val="2B2B2B"/>
+                </a:solidFill>
+                <a:latin typeface="Calibri"/>
+              </a:rPr>
+              <a:t>5 o 6 respuestas</a:t>
+            </a:r>
+            <a:r>
+              <a:rPr sz="1300" b="0" i="0">
+                <a:solidFill>
+                  <a:srgbClr val="2B2B2B"/>
+                </a:solidFill>
+                <a:latin typeface="Calibri"/>
+              </a:rPr>
+              <a:t> y proyecta el </a:t>
+            </a:r>
+            <a:r>
+              <a:rPr sz="1300" b="1" i="0">
+                <a:solidFill>
+                  <a:srgbClr val="2B2B2B"/>
+                </a:solidFill>
+                <a:latin typeface="Calibri"/>
+              </a:rPr>
+              <a:t>resumen</a:t>
+            </a:r>
+            <a:r>
+              <a:rPr sz="1300" b="0" i="0">
+                <a:solidFill>
+                  <a:srgbClr val="2B2B2B"/>
+                </a:solidFill>
+                <a:latin typeface="Calibri"/>
+              </a:rPr>
+              <a:t> del formulario — ahí quedan todas a la vista, no solo las leídas.</a:t>
+            </a:r>
+          </a:p>
+          <a:p>
+            <a:pPr>
+              <a:spcAft>
+                <a:spcPts val="1000"/>
+              </a:spcAft>
+            </a:pPr>
+            <a:r>
+              <a:rPr sz="1300" b="0" i="0">
+                <a:solidFill>
+                  <a:srgbClr val="2B2B2B"/>
+                </a:solidFill>
+                <a:latin typeface="Calibri"/>
+              </a:rPr>
+              <a:t>–   </a:t>
+            </a:r>
+            <a:r>
+              <a:rPr sz="1300" b="1" i="0">
+                <a:solidFill>
+                  <a:srgbClr val="2B2B2B"/>
+                </a:solidFill>
+                <a:latin typeface="Calibri"/>
+              </a:rPr>
+              <a:t>En vivo:</a:t>
+            </a:r>
+            <a:r>
+              <a:rPr sz="1300" b="0" i="0">
+                <a:solidFill>
+                  <a:srgbClr val="2B2B2B"/>
+                </a:solidFill>
+                <a:latin typeface="Calibri"/>
+              </a:rPr>
+              <a:t> las preguntas y las votaciones van por la </a:t>
+            </a:r>
+            <a:r>
+              <a:rPr sz="1300" b="1" i="0">
+                <a:solidFill>
+                  <a:srgbClr val="2B2B2B"/>
+                </a:solidFill>
+                <a:latin typeface="Calibri"/>
+              </a:rPr>
+              <a:t>encuesta</a:t>
+            </a:r>
+            <a:r>
+              <a:rPr sz="1300" b="0" i="0">
+                <a:solidFill>
+                  <a:srgbClr val="2B2B2B"/>
+                </a:solidFill>
+                <a:latin typeface="Calibri"/>
+              </a:rPr>
+              <a:t> y el </a:t>
+            </a:r>
+            <a:r>
+              <a:rPr sz="1300" b="1" i="0">
+                <a:solidFill>
+                  <a:srgbClr val="2B2B2B"/>
+                </a:solidFill>
+                <a:latin typeface="Calibri"/>
+              </a:rPr>
+              <a:t>Q&amp;A</a:t>
+            </a:r>
+            <a:r>
+              <a:rPr sz="1300" b="0" i="0">
+                <a:solidFill>
+                  <a:srgbClr val="2B2B2B"/>
+                </a:solidFill>
+                <a:latin typeface="Calibri"/>
+              </a:rPr>
+              <a:t> del propio Meet; no hay que abrir ninguna otra plataforma.</a:t>
+            </a:r>
+          </a:p>
+          <a:p>
+            <a:pPr>
+              <a:spcAft>
+                <a:spcPts val="1000"/>
+              </a:spcAft>
+            </a:pPr>
+            <a:r>
+              <a:rPr sz="1300" b="0" i="0">
+                <a:solidFill>
+                  <a:srgbClr val="2B2B2B"/>
+                </a:solidFill>
+                <a:latin typeface="Calibri"/>
+              </a:rPr>
+              <a:t>–   </a:t>
+            </a:r>
+            <a:r>
+              <a:rPr sz="1300" b="1" i="0">
+                <a:solidFill>
+                  <a:srgbClr val="2B2B2B"/>
+                </a:solidFill>
+                <a:latin typeface="Calibri"/>
+              </a:rPr>
+              <a:t>Después:</a:t>
+            </a:r>
+            <a:r>
+              <a:rPr sz="1300" b="0" i="0">
+                <a:solidFill>
+                  <a:srgbClr val="2B2B2B"/>
+                </a:solidFill>
+                <a:latin typeface="Calibri"/>
+              </a:rPr>
+              <a:t> las respuestas quedan en una hoja que el Docente usa todo el periodo (equipos, ejemplos y seguimiento).</a:t>
             </a:r>
           </a:p>
         </p:txBody>
@@ -10155,40 +10392,16 @@
           </a:p>
         </p:txBody>
       </p:sp>
-      <p:pic>
-        <p:nvPicPr>
-          <p:cNvPr id="7" name="Picture 6" descr="qr_presentacion_estudiantes.png"/>
-          <p:cNvPicPr>
-            <a:picLocks noChangeAspect="1"/>
-          </p:cNvPicPr>
-          <p:nvPr/>
-        </p:nvPicPr>
-        <p:blipFill>
-          <a:blip r:embed="rId2"/>
-          <a:stretch>
-            <a:fillRect/>
-          </a:stretch>
-        </p:blipFill>
-        <p:spPr>
-          <a:xfrm>
-            <a:off x="8442655" y="2103120"/>
-            <a:ext cx="3108960" cy="3108960"/>
-          </a:xfrm>
-          <a:prstGeom prst="rect">
-            <a:avLst/>
-          </a:prstGeom>
-        </p:spPr>
-      </p:pic>
-      <p:sp>
-        <p:nvSpPr>
-          <p:cNvPr id="8" name="TextBox 7"/>
+      <p:sp>
+        <p:nvSpPr>
+          <p:cNvPr id="7" name="TextBox 6"/>
           <p:cNvSpPr txBox="1"/>
           <p:nvPr/>
         </p:nvSpPr>
         <p:spPr>
           <a:xfrm>
-            <a:off x="8332927" y="5230367"/>
-            <a:ext cx="3328415" cy="256032"/>
+            <a:off x="8579815" y="2926079"/>
+            <a:ext cx="2834640" cy="1463040"/>
           </a:xfrm>
           <a:prstGeom prst="rect">
             <a:avLst/>
@@ -10196,34 +10409,50 @@
           <a:noFill/>
         </p:spPr>
         <p:txBody>
-          <a:bodyPr wrap="square" anchor="t" lIns="0" rIns="0" tIns="0" bIns="0">
+          <a:bodyPr wrap="square" anchor="ctr" lIns="0" rIns="0" tIns="0" bIns="0">
             <a:spAutoFit/>
           </a:bodyPr>
           <a:lstStyle/>
           <a:p>
             <a:pPr algn="ctr"/>
             <a:r>
-              <a:rPr sz="1200" b="1" i="0">
+              <a:rPr sz="1800" b="1" i="0">
                 <a:solidFill>
                   <a:srgbClr val="0C2340"/>
                 </a:solidFill>
                 <a:latin typeface="Calibri"/>
               </a:rPr>
-              <a:t>Escanea o abre</a:t>
-            </a:r>
-          </a:p>
-        </p:txBody>
-      </p:sp>
-      <p:sp>
-        <p:nvSpPr>
-          <p:cNvPr id="9" name="TextBox 8"/>
+              <a:t>QR pendiente</a:t>
+            </a:r>
+          </a:p>
+          <a:p>
+            <a:pPr algn="ctr">
+              <a:spcBef>
+                <a:spcPts val="1000"/>
+              </a:spcBef>
+            </a:pPr>
+            <a:r>
+              <a:rPr sz="1200" b="0" i="0">
+                <a:solidFill>
+                  <a:srgbClr val="2B2B2B"/>
+                </a:solidFill>
+                <a:latin typeface="Calibri"/>
+              </a:rPr>
+              <a:t>Se genera cuando el formulario tenga enlace real.</a:t>
+            </a:r>
+          </a:p>
+        </p:txBody>
+      </p:sp>
+      <p:sp>
+        <p:nvSpPr>
+          <p:cNvPr id="8" name="TextBox 7"/>
           <p:cNvSpPr txBox="1"/>
           <p:nvPr/>
         </p:nvSpPr>
         <p:spPr>
           <a:xfrm>
-            <a:off x="8332927" y="5468112"/>
-            <a:ext cx="3328415" cy="411480"/>
+            <a:off x="8332927" y="5230367"/>
+            <a:ext cx="3328415" cy="640080"/>
           </a:xfrm>
           <a:prstGeom prst="rect">
             <a:avLst/>
@@ -10244,14 +10473,14 @@
                 </a:solidFill>
                 <a:latin typeface="Calibri"/>
               </a:rPr>
-              <a:t>https://padlet.com/andres_dfx/cun-wruz81hmf9k06gd7</a:t>
-            </a:r>
-          </a:p>
-        </p:txBody>
-      </p:sp>
-      <p:sp>
-        <p:nvSpPr>
-          <p:cNvPr id="10" name="TextBox 9"/>
+              <a:t>[URL Formulario Preséntate — pendiente · PROYECTO I]</a:t>
+            </a:r>
+          </a:p>
+        </p:txBody>
+      </p:sp>
+      <p:sp>
+        <p:nvSpPr>
+          <p:cNvPr id="9" name="TextBox 8"/>
           <p:cNvSpPr txBox="1"/>
           <p:nvPr/>
         </p:nvSpPr>

--- a/Especializacion/Proyecto I/Clases/Presentacion del Curso - Proyecto I.pptx
+++ b/Especializacion/Proyecto I/Clases/Presentacion del Curso - Proyecto I.pptx
@@ -9937,7 +9937,7 @@
                 </a:solidFill>
                 <a:latin typeface="Calibri"/>
               </a:rPr>
-              <a:t>PRESÉNTATE — ROMPEHIELOS</a:t>
+              <a:t>ROMPEHIELOS — DOS VERDADES Y UNA MENTIRA</a:t>
             </a:r>
           </a:p>
         </p:txBody>
@@ -9972,7 +9972,7 @@
                 </a:solidFill>
                 <a:latin typeface="Calibri"/>
               </a:rPr>
-              <a:t>Formulario de Google · encuestas y Q&amp;A en el propio Meet</a:t>
+              <a:t>Dos verdades y una mentira · Slido · 8 minutos</a:t>
             </a:r>
           </a:p>
         </p:txBody>
@@ -10020,7 +10020,7 @@
                 </a:solidFill>
                 <a:latin typeface="Calibri"/>
               </a:rPr>
-              <a:t>Escanea el QR o abre:</a:t>
+              <a:t>Entra a slido.com</a:t>
             </a:r>
             <a:r>
               <a:rPr sz="1300" b="0" i="0">
@@ -10029,7 +10029,25 @@
                 </a:solidFill>
                 <a:latin typeface="Calibri"/>
               </a:rPr>
-              <a:t> [URL Formulario Preséntate — pendiente · PROYECTO I]</a:t>
+              <a:t> y escribe el </a:t>
+            </a:r>
+            <a:r>
+              <a:rPr sz="1300" b="1" i="0">
+                <a:solidFill>
+                  <a:srgbClr val="2B2B2B"/>
+                </a:solidFill>
+                <a:latin typeface="Calibri"/>
+              </a:rPr>
+              <a:t>código del evento</a:t>
+            </a:r>
+            <a:r>
+              <a:rPr sz="1300" b="0" i="0">
+                <a:solidFill>
+                  <a:srgbClr val="2B2B2B"/>
+                </a:solidFill>
+                <a:latin typeface="Calibri"/>
+              </a:rPr>
+              <a:t> que el Docente pega en el chat del Meet. Sin cuenta ni instalar nada.</a:t>
             </a:r>
           </a:p>
           <a:p>
@@ -10054,7 +10072,7 @@
                 </a:solidFill>
                 <a:latin typeface="Calibri"/>
               </a:rPr>
-              <a:t>Qué respondes (1 min):</a:t>
+              <a:t>El juego:</a:t>
             </a:r>
             <a:r>
               <a:rPr sz="1300" b="0" i="0">
@@ -10063,7 +10081,7 @@
                 </a:solidFill>
                 <a:latin typeface="Calibri"/>
               </a:rPr>
-              <a:t> tu </a:t>
+              <a:t> «</a:t>
             </a:r>
             <a:r>
               <a:rPr sz="1300" b="1" i="0">
@@ -10072,7 +10090,7 @@
                 </a:solidFill>
                 <a:latin typeface="Calibri"/>
               </a:rPr>
-              <a:t>nombre</a:t>
+              <a:t>dos verdades y una mentira</a:t>
             </a:r>
             <a:r>
               <a:rPr sz="1300" b="0" i="0">
@@ -10081,7 +10099,7 @@
                 </a:solidFill>
                 <a:latin typeface="Calibri"/>
               </a:rPr>
-              <a:t> + </a:t>
+              <a:t>» sobre el Docente. Se proyectan tres frases suyas y votas </a:t>
             </a:r>
             <a:r>
               <a:rPr sz="1300" b="1" i="0">
@@ -10090,7 +10108,7 @@
                 </a:solidFill>
                 <a:latin typeface="Calibri"/>
               </a:rPr>
-              <a:t>expectativa del curso</a:t>
+              <a:t>cuál de las tres NO es cierta</a:t>
             </a:r>
             <a:r>
               <a:rPr sz="1300" b="0" i="0">
@@ -10099,7 +10117,7 @@
                 </a:solidFill>
                 <a:latin typeface="Calibri"/>
               </a:rPr>
-              <a:t> + un </a:t>
+              <a:t> — acertar es </a:t>
             </a:r>
             <a:r>
               <a:rPr sz="1300" b="1" i="0">
@@ -10108,7 +10126,7 @@
                 </a:solidFill>
                 <a:latin typeface="Calibri"/>
               </a:rPr>
-              <a:t>tema tentativo</a:t>
+              <a:t>1 entre 3</a:t>
             </a:r>
             <a:r>
               <a:rPr sz="1300" b="0" i="0">
@@ -10117,25 +10135,7 @@
                 </a:solidFill>
                 <a:latin typeface="Calibri"/>
               </a:rPr>
-              <a:t> de investigación (1 frase). Entras con tu correo </a:t>
-            </a:r>
-            <a:r>
-              <a:rPr sz="1300" b="1" i="0">
-                <a:solidFill>
-                  <a:srgbClr val="2B2B2B"/>
-                </a:solidFill>
-                <a:latin typeface="Calibri"/>
-              </a:rPr>
-              <a:t>@cun.edu.co</a:t>
-            </a:r>
-            <a:r>
-              <a:rPr sz="1300" b="0" i="0">
-                <a:solidFill>
-                  <a:srgbClr val="2B2B2B"/>
-                </a:solidFill>
-                <a:latin typeface="Calibri"/>
-              </a:rPr>
-              <a:t>: no hay que crear cuenta ni instalar nada.</a:t>
+              <a:t>, así que arrancamos todos iguales.</a:t>
             </a:r>
           </a:p>
           <a:p>
@@ -10160,7 +10160,7 @@
                 </a:solidFill>
                 <a:latin typeface="Calibri"/>
               </a:rPr>
-              <a:t>Ahora, ~3 min.</a:t>
+              <a:t>Tres rondas (~4 min).</a:t>
             </a:r>
             <a:r>
               <a:rPr sz="1300" b="0" i="0">
@@ -10169,7 +10169,7 @@
                 </a:solidFill>
                 <a:latin typeface="Calibri"/>
               </a:rPr>
-              <a:t> Somos 50: no alcanzamos a presentarnos uno por uno, así que el formulario nos ordena.</a:t>
+              <a:t> Al cerrar cada una el Docente revela la mentira y cuenta la historia de la verdad más rara: ahí queda hecha su presentación.</a:t>
             </a:r>
           </a:p>
           <a:p>
@@ -10194,7 +10194,7 @@
                 </a:solidFill>
                 <a:latin typeface="Calibri"/>
               </a:rPr>
-              <a:t>Con eso, hoy:</a:t>
+              <a:t>Ronda final (~2 min):</a:t>
             </a:r>
             <a:r>
               <a:rPr sz="1300" b="0" i="0">
@@ -10203,7 +10203,7 @@
                 </a:solidFill>
                 <a:latin typeface="Calibri"/>
               </a:rPr>
-              <a:t> el Docente lee en voz alta </a:t>
+              <a:t> sale la tabla de posiciones y los </a:t>
             </a:r>
             <a:r>
               <a:rPr sz="1300" b="1" i="0">
@@ -10212,7 +10212,7 @@
                 </a:solidFill>
                 <a:latin typeface="Calibri"/>
               </a:rPr>
-              <a:t>5 o 6 respuestas</a:t>
+              <a:t>tres primeros</a:t>
             </a:r>
             <a:r>
               <a:rPr sz="1300" b="0" i="0">
@@ -10221,7 +10221,7 @@
                 </a:solidFill>
                 <a:latin typeface="Calibri"/>
               </a:rPr>
-              <a:t> y proyecta el </a:t>
+              <a:t> toman el micrófono con </a:t>
             </a:r>
             <a:r>
               <a:rPr sz="1300" b="1" i="0">
@@ -10230,7 +10230,7 @@
                 </a:solidFill>
                 <a:latin typeface="Calibri"/>
               </a:rPr>
-              <a:t>resumen</a:t>
+              <a:t>sus</a:t>
             </a:r>
             <a:r>
               <a:rPr sz="1300" b="0" i="0">
@@ -10239,7 +10239,7 @@
                 </a:solidFill>
                 <a:latin typeface="Calibri"/>
               </a:rPr>
-              <a:t> del formulario — ahí quedan todas a la vista, no solo las leídas.</a:t>
+              <a:t> dos verdades y una mentira. Gana quien engañe a más gente. Hablan tres, no 50.</a:t>
             </a:r>
           </a:p>
           <a:p>
@@ -10264,7 +10264,7 @@
                 </a:solidFill>
                 <a:latin typeface="Calibri"/>
               </a:rPr>
-              <a:t>En vivo:</a:t>
+              <a:t>Premio:</a:t>
             </a:r>
             <a:r>
               <a:rPr sz="1300" b="0" i="0">
@@ -10273,7 +10273,7 @@
                 </a:solidFill>
                 <a:latin typeface="Calibri"/>
               </a:rPr>
-              <a:t> las preguntas y las votaciones van por la </a:t>
+              <a:t> </a:t>
             </a:r>
             <a:r>
               <a:rPr sz="1300" b="1" i="0">
@@ -10282,7 +10282,7 @@
                 </a:solidFill>
                 <a:latin typeface="Calibri"/>
               </a:rPr>
-              <a:t>encuesta</a:t>
+              <a:t>revisión 1 a 1 con el Docente</a:t>
             </a:r>
             <a:r>
               <a:rPr sz="1300" b="0" i="0">
@@ -10291,25 +10291,7 @@
                 </a:solidFill>
                 <a:latin typeface="Calibri"/>
               </a:rPr>
-              <a:t> y el </a:t>
-            </a:r>
-            <a:r>
-              <a:rPr sz="1300" b="1" i="0">
-                <a:solidFill>
-                  <a:srgbClr val="2B2B2B"/>
-                </a:solidFill>
-                <a:latin typeface="Calibri"/>
-              </a:rPr>
-              <a:t>Q&amp;A</a:t>
-            </a:r>
-            <a:r>
-              <a:rPr sz="1300" b="0" i="0">
-                <a:solidFill>
-                  <a:srgbClr val="2B2B2B"/>
-                </a:solidFill>
-                <a:latin typeface="Calibri"/>
-              </a:rPr>
-              <a:t> del propio Meet; no hay que abrir ninguna otra plataforma.</a:t>
+              <a:t> del avance del ganador, antes de la primera entrega.</a:t>
             </a:r>
           </a:p>
           <a:p>
@@ -10334,7 +10316,7 @@
                 </a:solidFill>
                 <a:latin typeface="Calibri"/>
               </a:rPr>
-              <a:t>Después:</a:t>
+              <a:t>Las preguntas</a:t>
             </a:r>
             <a:r>
               <a:rPr sz="1300" b="0" i="0">
@@ -10343,7 +10325,25 @@
                 </a:solidFill>
                 <a:latin typeface="Calibri"/>
               </a:rPr>
-              <a:t> las respuestas quedan en una hoja que el Docente usa todo el periodo (equipos, ejemplos y seguimiento).</a:t>
+              <a:t> de toda la sesión van por el </a:t>
+            </a:r>
+            <a:r>
+              <a:rPr sz="1300" b="1" i="0">
+                <a:solidFill>
+                  <a:srgbClr val="2B2B2B"/>
+                </a:solidFill>
+                <a:latin typeface="Calibri"/>
+              </a:rPr>
+              <a:t>Q&amp;A</a:t>
+            </a:r>
+            <a:r>
+              <a:rPr sz="1300" b="0" i="0">
+                <a:solidFill>
+                  <a:srgbClr val="2B2B2B"/>
+                </a:solidFill>
+                <a:latin typeface="Calibri"/>
+              </a:rPr>
+              <a:t> del mismo Slido.</a:t>
             </a:r>
           </a:p>
         </p:txBody>
@@ -10400,8 +10400,8 @@
         </p:nvSpPr>
         <p:spPr>
           <a:xfrm>
-            <a:off x="8579815" y="2926079"/>
-            <a:ext cx="2834640" cy="1463040"/>
+            <a:off x="8534095" y="2606039"/>
+            <a:ext cx="2926079" cy="2103120"/>
           </a:xfrm>
           <a:prstGeom prst="rect">
             <a:avLst/>
@@ -10416,29 +10416,65 @@
           <a:p>
             <a:pPr algn="ctr"/>
             <a:r>
-              <a:rPr sz="1800" b="1" i="0">
-                <a:solidFill>
-                  <a:srgbClr val="0C2340"/>
-                </a:solidFill>
-                <a:latin typeface="Calibri"/>
-              </a:rPr>
-              <a:t>QR pendiente</a:t>
+              <a:rPr sz="3000" b="1" i="0">
+                <a:solidFill>
+                  <a:srgbClr val="007433"/>
+                </a:solidFill>
+                <a:latin typeface="Calibri"/>
+              </a:rPr>
+              <a:t>slido.com</a:t>
             </a:r>
           </a:p>
           <a:p>
             <a:pPr algn="ctr">
               <a:spcBef>
-                <a:spcPts val="1000"/>
+                <a:spcPts val="1400"/>
               </a:spcBef>
             </a:pPr>
             <a:r>
-              <a:rPr sz="1200" b="0" i="0">
-                <a:solidFill>
-                  <a:srgbClr val="2B2B2B"/>
-                </a:solidFill>
-                <a:latin typeface="Calibri"/>
-              </a:rPr>
-              <a:t>Se genera cuando el formulario tenga enlace real.</a:t>
+              <a:rPr sz="1300" b="0" i="0">
+                <a:solidFill>
+                  <a:srgbClr val="0C2340"/>
+                </a:solidFill>
+                <a:latin typeface="Calibri"/>
+              </a:rPr>
+              <a:t>El </a:t>
+            </a:r>
+            <a:r>
+              <a:rPr sz="1300" b="1" i="0">
+                <a:solidFill>
+                  <a:srgbClr val="0C2340"/>
+                </a:solidFill>
+                <a:latin typeface="Calibri"/>
+              </a:rPr>
+              <a:t>código del evento</a:t>
+            </a:r>
+            <a:r>
+              <a:rPr sz="1300" b="0" i="0">
+                <a:solidFill>
+                  <a:srgbClr val="0C2340"/>
+                </a:solidFill>
+                <a:latin typeface="Calibri"/>
+              </a:rPr>
+              <a:t> te lo pega el Docente en el </a:t>
+            </a:r>
+            <a:r>
+              <a:rPr sz="1300" b="1" i="0">
+                <a:solidFill>
+                  <a:srgbClr val="0C2340"/>
+                </a:solidFill>
+                <a:latin typeface="Calibri"/>
+              </a:rPr>
+              <a:t>chat del Meet</a:t>
+            </a:r>
+            <a:r>
+              <a:rPr sz="1300" b="0" i="0">
+                <a:solidFill>
+                  <a:srgbClr val="0C2340"/>
+                </a:solidFill>
+                <a:latin typeface="Calibri"/>
+              </a:rPr>
+              <a:t>.</a:t>
             </a:r>
           </a:p>
         </p:txBody>
@@ -10473,7 +10509,7 @@
                 </a:solidFill>
                 <a:latin typeface="Calibri"/>
               </a:rPr>
-              <a:t>[URL Formulario Preséntate — pendiente · PROYECTO I]</a:t>
+              <a:t>[URL Slido — evento del rompehielos pendiente · PROYECTO I]</a:t>
             </a:r>
           </a:p>
         </p:txBody>
